--- a/03-课件PPT/讲次版/第2章-3-讲次 2-3 · 工具治理与安全边界.pptx
+++ b/03-课件PPT/讲次版/第2章-3-讲次 2-3 · 工具治理与安全边界.pptx
@@ -5919,21 +5919,407 @@
                 </a:solidFill>
                 <a:latin typeface="PingFang SC"/>
               </a:rPr>
-              <a:t>SQL 四道闸实测,只读账号: SELECT only;表级权限: business_ro 白名单;强制 LIMIT 1000 + 超时 3s;DDL/DML 关键词静态拦截;# 全部 SQL 进审计(哈希链防篡改);# NL2SQL 永远不直连生产写库</a:t>
-            </a:r>
-          </a:p>
-        </p:txBody>
-      </p:sp>
-      <p:sp>
-        <p:nvSpPr>
-          <p:cNvPr id="5" name="TextBox 4"/>
+              <a:t>SQL 四道闸实测</a:t>
+            </a:r>
+          </a:p>
+        </p:txBody>
+      </p:sp>
+      <p:sp>
+        <p:nvSpPr>
+          <p:cNvPr id="5" name="Rounded Rectangle 4"/>
+          <p:cNvSpPr/>
+          <p:nvPr/>
+        </p:nvSpPr>
+        <p:spPr>
+          <a:xfrm>
+            <a:off x="1333500" y="1047750"/>
+            <a:ext cx="9525000" cy="2952750"/>
+          </a:xfrm>
+          <a:prstGeom prst="roundRect">
+            <a:avLst>
+              <a:gd name="adj" fmla="val 8000"/>
+            </a:avLst>
+          </a:prstGeom>
+          <a:solidFill>
+            <a:srgbClr val="0D1117"/>
+          </a:solidFill>
+          <a:ln>
+            <a:noFill/>
+          </a:ln>
+          <a:effectLst/>
+        </p:spPr>
+        <p:style>
+          <a:lnRef idx="1">
+            <a:schemeClr val="accent1"/>
+          </a:lnRef>
+          <a:fillRef idx="3">
+            <a:schemeClr val="accent1"/>
+          </a:fillRef>
+          <a:effectRef idx="2">
+            <a:schemeClr val="accent1"/>
+          </a:effectRef>
+          <a:fontRef idx="minor">
+            <a:schemeClr val="lt1"/>
+          </a:fontRef>
+        </p:style>
+        <p:txBody>
+          <a:bodyPr rtlCol="0" anchor="ctr"/>
+          <a:lstStyle/>
+          <a:p>
+            <a:pPr algn="ctr"/>
+          </a:p>
+        </p:txBody>
+      </p:sp>
+      <p:sp>
+        <p:nvSpPr>
+          <p:cNvPr id="6" name="Rectangle 5"/>
+          <p:cNvSpPr/>
+          <p:nvPr/>
+        </p:nvSpPr>
+        <p:spPr>
+          <a:xfrm>
+            <a:off x="1333500" y="1047750"/>
+            <a:ext cx="9525000" cy="381000"/>
+          </a:xfrm>
+          <a:prstGeom prst="rect">
+            <a:avLst/>
+          </a:prstGeom>
+          <a:solidFill>
+            <a:srgbClr val="1F2937"/>
+          </a:solidFill>
+          <a:ln>
+            <a:noFill/>
+          </a:ln>
+          <a:effectLst/>
+        </p:spPr>
+        <p:style>
+          <a:lnRef idx="1">
+            <a:schemeClr val="accent1"/>
+          </a:lnRef>
+          <a:fillRef idx="3">
+            <a:schemeClr val="accent1"/>
+          </a:fillRef>
+          <a:effectRef idx="2">
+            <a:schemeClr val="accent1"/>
+          </a:effectRef>
+          <a:fontRef idx="minor">
+            <a:schemeClr val="lt1"/>
+          </a:fontRef>
+        </p:style>
+        <p:txBody>
+          <a:bodyPr rtlCol="0" anchor="ctr"/>
+          <a:lstStyle/>
+          <a:p>
+            <a:pPr algn="ctr"/>
+          </a:p>
+        </p:txBody>
+      </p:sp>
+      <p:sp>
+        <p:nvSpPr>
+          <p:cNvPr id="7" name="Rounded Rectangle 6"/>
+          <p:cNvSpPr/>
+          <p:nvPr/>
+        </p:nvSpPr>
+        <p:spPr>
+          <a:xfrm>
+            <a:off x="1504950" y="1181100"/>
+            <a:ext cx="123825" cy="123825"/>
+          </a:xfrm>
+          <a:prstGeom prst="roundRect">
+            <a:avLst>
+              <a:gd name="adj" fmla="val 8000"/>
+            </a:avLst>
+          </a:prstGeom>
+          <a:solidFill>
+            <a:srgbClr val="F87171"/>
+          </a:solidFill>
+          <a:ln>
+            <a:noFill/>
+          </a:ln>
+          <a:effectLst/>
+        </p:spPr>
+        <p:style>
+          <a:lnRef idx="1">
+            <a:schemeClr val="accent1"/>
+          </a:lnRef>
+          <a:fillRef idx="3">
+            <a:schemeClr val="accent1"/>
+          </a:fillRef>
+          <a:effectRef idx="2">
+            <a:schemeClr val="accent1"/>
+          </a:effectRef>
+          <a:fontRef idx="minor">
+            <a:schemeClr val="lt1"/>
+          </a:fontRef>
+        </p:style>
+        <p:txBody>
+          <a:bodyPr rtlCol="0" anchor="ctr"/>
+          <a:lstStyle/>
+          <a:p>
+            <a:pPr algn="ctr"/>
+          </a:p>
+        </p:txBody>
+      </p:sp>
+      <p:sp>
+        <p:nvSpPr>
+          <p:cNvPr id="8" name="Rounded Rectangle 7"/>
+          <p:cNvSpPr/>
+          <p:nvPr/>
+        </p:nvSpPr>
+        <p:spPr>
+          <a:xfrm>
+            <a:off x="1752600" y="1181100"/>
+            <a:ext cx="123825" cy="123825"/>
+          </a:xfrm>
+          <a:prstGeom prst="roundRect">
+            <a:avLst>
+              <a:gd name="adj" fmla="val 8000"/>
+            </a:avLst>
+          </a:prstGeom>
+          <a:solidFill>
+            <a:srgbClr val="F59E0B"/>
+          </a:solidFill>
+          <a:ln>
+            <a:noFill/>
+          </a:ln>
+          <a:effectLst/>
+        </p:spPr>
+        <p:style>
+          <a:lnRef idx="1">
+            <a:schemeClr val="accent1"/>
+          </a:lnRef>
+          <a:fillRef idx="3">
+            <a:schemeClr val="accent1"/>
+          </a:fillRef>
+          <a:effectRef idx="2">
+            <a:schemeClr val="accent1"/>
+          </a:effectRef>
+          <a:fontRef idx="minor">
+            <a:schemeClr val="lt1"/>
+          </a:fontRef>
+        </p:style>
+        <p:txBody>
+          <a:bodyPr rtlCol="0" anchor="ctr"/>
+          <a:lstStyle/>
+          <a:p>
+            <a:pPr algn="ctr"/>
+          </a:p>
+        </p:txBody>
+      </p:sp>
+      <p:sp>
+        <p:nvSpPr>
+          <p:cNvPr id="9" name="Rounded Rectangle 8"/>
+          <p:cNvSpPr/>
+          <p:nvPr/>
+        </p:nvSpPr>
+        <p:spPr>
+          <a:xfrm>
+            <a:off x="2000250" y="1181100"/>
+            <a:ext cx="123825" cy="123825"/>
+          </a:xfrm>
+          <a:prstGeom prst="roundRect">
+            <a:avLst>
+              <a:gd name="adj" fmla="val 8000"/>
+            </a:avLst>
+          </a:prstGeom>
+          <a:solidFill>
+            <a:srgbClr val="34D399"/>
+          </a:solidFill>
+          <a:ln>
+            <a:noFill/>
+          </a:ln>
+          <a:effectLst/>
+        </p:spPr>
+        <p:style>
+          <a:lnRef idx="1">
+            <a:schemeClr val="accent1"/>
+          </a:lnRef>
+          <a:fillRef idx="3">
+            <a:schemeClr val="accent1"/>
+          </a:fillRef>
+          <a:effectRef idx="2">
+            <a:schemeClr val="accent1"/>
+          </a:effectRef>
+          <a:fontRef idx="minor">
+            <a:schemeClr val="lt1"/>
+          </a:fontRef>
+        </p:style>
+        <p:txBody>
+          <a:bodyPr rtlCol="0" anchor="ctr"/>
+          <a:lstStyle/>
+          <a:p>
+            <a:pPr algn="ctr"/>
+          </a:p>
+        </p:txBody>
+      </p:sp>
+      <p:sp>
+        <p:nvSpPr>
+          <p:cNvPr id="10" name="TextBox 9"/>
           <p:cNvSpPr txBox="1"/>
           <p:nvPr/>
         </p:nvSpPr>
         <p:spPr>
           <a:xfrm>
-            <a:off x="9334500" y="0"/>
-            <a:ext cx="2667000" cy="704850"/>
+            <a:off x="2381250" y="1047750"/>
+            <a:ext cx="8286750" cy="381000"/>
+          </a:xfrm>
+          <a:prstGeom prst="rect">
+            <a:avLst/>
+          </a:prstGeom>
+          <a:noFill/>
+        </p:spPr>
+        <p:txBody>
+          <a:bodyPr wrap="square" anchor="ctr">
+            <a:spAutoFit/>
+          </a:bodyPr>
+          <a:lstStyle/>
+          <a:p>
+            <a:pPr algn="l">
+              <a:lnSpc>
+                <a:spcPct val="100000"/>
+              </a:lnSpc>
+            </a:pPr>
+            <a:r>
+              <a:rPr sz="1100" b="0">
+                <a:solidFill>
+                  <a:srgbClr val="94A3B8"/>
+                </a:solidFill>
+                <a:latin typeface="PingFang SC"/>
+              </a:rPr>
+              <a:t>terminal — 平台实测</a:t>
+            </a:r>
+          </a:p>
+        </p:txBody>
+      </p:sp>
+      <p:sp>
+        <p:nvSpPr>
+          <p:cNvPr id="11" name="TextBox 10"/>
+          <p:cNvSpPr txBox="1"/>
+          <p:nvPr/>
+        </p:nvSpPr>
+        <p:spPr>
+          <a:xfrm>
+            <a:off x="1562100" y="1581150"/>
+            <a:ext cx="9067800" cy="2286000"/>
+          </a:xfrm>
+          <a:prstGeom prst="rect">
+            <a:avLst/>
+          </a:prstGeom>
+          <a:noFill/>
+        </p:spPr>
+        <p:txBody>
+          <a:bodyPr wrap="square">
+            <a:spAutoFit/>
+          </a:bodyPr>
+          <a:lstStyle/>
+          <a:p>
+            <a:pPr>
+              <a:lnSpc>
+                <a:spcPct val="115000"/>
+              </a:lnSpc>
+            </a:pPr>
+            <a:r>
+              <a:rPr sz="1300">
+                <a:solidFill>
+                  <a:srgbClr val="CBD5E1"/>
+                </a:solidFill>
+                <a:latin typeface="Menlo"/>
+              </a:rPr>
+              <a:t>只读账号: SELECT only</a:t>
+            </a:r>
+          </a:p>
+          <a:p>
+            <a:pPr>
+              <a:lnSpc>
+                <a:spcPct val="115000"/>
+              </a:lnSpc>
+            </a:pPr>
+            <a:r>
+              <a:rPr sz="1300">
+                <a:solidFill>
+                  <a:srgbClr val="CBD5E1"/>
+                </a:solidFill>
+                <a:latin typeface="Menlo"/>
+              </a:rPr>
+              <a:t>表级权限: business_ro 白名单</a:t>
+            </a:r>
+          </a:p>
+          <a:p>
+            <a:pPr>
+              <a:lnSpc>
+                <a:spcPct val="115000"/>
+              </a:lnSpc>
+            </a:pPr>
+            <a:r>
+              <a:rPr sz="1300">
+                <a:solidFill>
+                  <a:srgbClr val="CBD5E1"/>
+                </a:solidFill>
+                <a:latin typeface="Menlo"/>
+              </a:rPr>
+              <a:t>强制 LIMIT 1000 + 超时 3s</a:t>
+            </a:r>
+          </a:p>
+          <a:p>
+            <a:pPr>
+              <a:lnSpc>
+                <a:spcPct val="115000"/>
+              </a:lnSpc>
+            </a:pPr>
+            <a:r>
+              <a:rPr sz="1300">
+                <a:solidFill>
+                  <a:srgbClr val="CBD5E1"/>
+                </a:solidFill>
+                <a:latin typeface="Menlo"/>
+              </a:rPr>
+              <a:t>DDL/DML 关键词静态拦截</a:t>
+            </a:r>
+          </a:p>
+          <a:p>
+            <a:pPr>
+              <a:lnSpc>
+                <a:spcPct val="115000"/>
+              </a:lnSpc>
+            </a:pPr>
+            <a:r>
+              <a:rPr sz="1300">
+                <a:solidFill>
+                  <a:srgbClr val="94A3B8"/>
+                </a:solidFill>
+                <a:latin typeface="Menlo"/>
+              </a:rPr>
+              <a:t># 全部 SQL 进审计(哈希链防篡改)</a:t>
+            </a:r>
+          </a:p>
+          <a:p>
+            <a:pPr>
+              <a:lnSpc>
+                <a:spcPct val="115000"/>
+              </a:lnSpc>
+            </a:pPr>
+            <a:r>
+              <a:rPr sz="1300">
+                <a:solidFill>
+                  <a:srgbClr val="94A3B8"/>
+                </a:solidFill>
+                <a:latin typeface="Menlo"/>
+              </a:rPr>
+              <a:t># NL2SQL 永远不直连生产写库</a:t>
+            </a:r>
+          </a:p>
+        </p:txBody>
+      </p:sp>
+      <p:sp>
+        <p:nvSpPr>
+          <p:cNvPr id="12" name="TextBox 11"/>
+          <p:cNvSpPr txBox="1"/>
+          <p:nvPr/>
+        </p:nvSpPr>
+        <p:spPr>
+          <a:xfrm>
+            <a:off x="10287000" y="6534150"/>
+            <a:ext cx="1619250" cy="266700"/>
           </a:xfrm>
           <a:prstGeom prst="rect">
             <a:avLst/>
@@ -5952,351 +6338,6 @@
               </a:lnSpc>
             </a:pPr>
             <a:r>
-              <a:rPr sz="1100" b="0">
-                <a:solidFill>
-                  <a:srgbClr val="94A3B8"/>
-                </a:solidFill>
-                <a:latin typeface="PingFang SC"/>
-              </a:rPr>
-              <a:t>风控栈配置实录</a:t>
-            </a:r>
-          </a:p>
-        </p:txBody>
-      </p:sp>
-      <p:sp>
-        <p:nvSpPr>
-          <p:cNvPr id="6" name="Rounded Rectangle 5"/>
-          <p:cNvSpPr/>
-          <p:nvPr/>
-        </p:nvSpPr>
-        <p:spPr>
-          <a:xfrm>
-            <a:off x="1333500" y="952500"/>
-            <a:ext cx="9525000" cy="5048250"/>
-          </a:xfrm>
-          <a:prstGeom prst="roundRect">
-            <a:avLst>
-              <a:gd name="adj" fmla="val 8000"/>
-            </a:avLst>
-          </a:prstGeom>
-          <a:solidFill>
-            <a:srgbClr val="0D1117"/>
-          </a:solidFill>
-          <a:ln>
-            <a:noFill/>
-          </a:ln>
-          <a:effectLst/>
-        </p:spPr>
-        <p:style>
-          <a:lnRef idx="1">
-            <a:schemeClr val="accent1"/>
-          </a:lnRef>
-          <a:fillRef idx="3">
-            <a:schemeClr val="accent1"/>
-          </a:fillRef>
-          <a:effectRef idx="2">
-            <a:schemeClr val="accent1"/>
-          </a:effectRef>
-          <a:fontRef idx="minor">
-            <a:schemeClr val="lt1"/>
-          </a:fontRef>
-        </p:style>
-        <p:txBody>
-          <a:bodyPr rtlCol="0" anchor="ctr"/>
-          <a:lstStyle/>
-          <a:p>
-            <a:pPr algn="ctr"/>
-          </a:p>
-        </p:txBody>
-      </p:sp>
-      <p:sp>
-        <p:nvSpPr>
-          <p:cNvPr id="7" name="Rectangle 6"/>
-          <p:cNvSpPr/>
-          <p:nvPr/>
-        </p:nvSpPr>
-        <p:spPr>
-          <a:xfrm>
-            <a:off x="1333500" y="952500"/>
-            <a:ext cx="9525000" cy="381000"/>
-          </a:xfrm>
-          <a:prstGeom prst="rect">
-            <a:avLst/>
-          </a:prstGeom>
-          <a:solidFill>
-            <a:srgbClr val="1F2937"/>
-          </a:solidFill>
-          <a:ln>
-            <a:noFill/>
-          </a:ln>
-          <a:effectLst/>
-        </p:spPr>
-        <p:style>
-          <a:lnRef idx="1">
-            <a:schemeClr val="accent1"/>
-          </a:lnRef>
-          <a:fillRef idx="3">
-            <a:schemeClr val="accent1"/>
-          </a:fillRef>
-          <a:effectRef idx="2">
-            <a:schemeClr val="accent1"/>
-          </a:effectRef>
-          <a:fontRef idx="minor">
-            <a:schemeClr val="lt1"/>
-          </a:fontRef>
-        </p:style>
-        <p:txBody>
-          <a:bodyPr rtlCol="0" anchor="ctr"/>
-          <a:lstStyle/>
-          <a:p>
-            <a:pPr algn="ctr"/>
-          </a:p>
-        </p:txBody>
-      </p:sp>
-      <p:sp>
-        <p:nvSpPr>
-          <p:cNvPr id="8" name="Rounded Rectangle 7"/>
-          <p:cNvSpPr/>
-          <p:nvPr/>
-        </p:nvSpPr>
-        <p:spPr>
-          <a:xfrm>
-            <a:off x="1504950" y="1085850"/>
-            <a:ext cx="123825" cy="123825"/>
-          </a:xfrm>
-          <a:prstGeom prst="roundRect">
-            <a:avLst>
-              <a:gd name="adj" fmla="val 8000"/>
-            </a:avLst>
-          </a:prstGeom>
-          <a:solidFill>
-            <a:srgbClr val="F87171"/>
-          </a:solidFill>
-          <a:ln>
-            <a:noFill/>
-          </a:ln>
-          <a:effectLst/>
-        </p:spPr>
-        <p:style>
-          <a:lnRef idx="1">
-            <a:schemeClr val="accent1"/>
-          </a:lnRef>
-          <a:fillRef idx="3">
-            <a:schemeClr val="accent1"/>
-          </a:fillRef>
-          <a:effectRef idx="2">
-            <a:schemeClr val="accent1"/>
-          </a:effectRef>
-          <a:fontRef idx="minor">
-            <a:schemeClr val="lt1"/>
-          </a:fontRef>
-        </p:style>
-        <p:txBody>
-          <a:bodyPr rtlCol="0" anchor="ctr"/>
-          <a:lstStyle/>
-          <a:p>
-            <a:pPr algn="ctr"/>
-          </a:p>
-        </p:txBody>
-      </p:sp>
-      <p:sp>
-        <p:nvSpPr>
-          <p:cNvPr id="9" name="Rounded Rectangle 8"/>
-          <p:cNvSpPr/>
-          <p:nvPr/>
-        </p:nvSpPr>
-        <p:spPr>
-          <a:xfrm>
-            <a:off x="1752600" y="1085850"/>
-            <a:ext cx="123825" cy="123825"/>
-          </a:xfrm>
-          <a:prstGeom prst="roundRect">
-            <a:avLst>
-              <a:gd name="adj" fmla="val 8000"/>
-            </a:avLst>
-          </a:prstGeom>
-          <a:solidFill>
-            <a:srgbClr val="F59E0B"/>
-          </a:solidFill>
-          <a:ln>
-            <a:noFill/>
-          </a:ln>
-          <a:effectLst/>
-        </p:spPr>
-        <p:style>
-          <a:lnRef idx="1">
-            <a:schemeClr val="accent1"/>
-          </a:lnRef>
-          <a:fillRef idx="3">
-            <a:schemeClr val="accent1"/>
-          </a:fillRef>
-          <a:effectRef idx="2">
-            <a:schemeClr val="accent1"/>
-          </a:effectRef>
-          <a:fontRef idx="minor">
-            <a:schemeClr val="lt1"/>
-          </a:fontRef>
-        </p:style>
-        <p:txBody>
-          <a:bodyPr rtlCol="0" anchor="ctr"/>
-          <a:lstStyle/>
-          <a:p>
-            <a:pPr algn="ctr"/>
-          </a:p>
-        </p:txBody>
-      </p:sp>
-      <p:sp>
-        <p:nvSpPr>
-          <p:cNvPr id="10" name="Rounded Rectangle 9"/>
-          <p:cNvSpPr/>
-          <p:nvPr/>
-        </p:nvSpPr>
-        <p:spPr>
-          <a:xfrm>
-            <a:off x="2000250" y="1085850"/>
-            <a:ext cx="123825" cy="123825"/>
-          </a:xfrm>
-          <a:prstGeom prst="roundRect">
-            <a:avLst>
-              <a:gd name="adj" fmla="val 8000"/>
-            </a:avLst>
-          </a:prstGeom>
-          <a:solidFill>
-            <a:srgbClr val="34D399"/>
-          </a:solidFill>
-          <a:ln>
-            <a:noFill/>
-          </a:ln>
-          <a:effectLst/>
-        </p:spPr>
-        <p:style>
-          <a:lnRef idx="1">
-            <a:schemeClr val="accent1"/>
-          </a:lnRef>
-          <a:fillRef idx="3">
-            <a:schemeClr val="accent1"/>
-          </a:fillRef>
-          <a:effectRef idx="2">
-            <a:schemeClr val="accent1"/>
-          </a:effectRef>
-          <a:fontRef idx="minor">
-            <a:schemeClr val="lt1"/>
-          </a:fontRef>
-        </p:style>
-        <p:txBody>
-          <a:bodyPr rtlCol="0" anchor="ctr"/>
-          <a:lstStyle/>
-          <a:p>
-            <a:pPr algn="ctr"/>
-          </a:p>
-        </p:txBody>
-      </p:sp>
-      <p:sp>
-        <p:nvSpPr>
-          <p:cNvPr id="11" name="TextBox 10"/>
-          <p:cNvSpPr txBox="1"/>
-          <p:nvPr/>
-        </p:nvSpPr>
-        <p:spPr>
-          <a:xfrm>
-            <a:off x="2381250" y="952500"/>
-            <a:ext cx="8286750" cy="381000"/>
-          </a:xfrm>
-          <a:prstGeom prst="rect">
-            <a:avLst/>
-          </a:prstGeom>
-          <a:noFill/>
-        </p:spPr>
-        <p:txBody>
-          <a:bodyPr wrap="square" anchor="ctr">
-            <a:spAutoFit/>
-          </a:bodyPr>
-          <a:lstStyle/>
-          <a:p>
-            <a:pPr algn="l">
-              <a:lnSpc>
-                <a:spcPct val="100000"/>
-              </a:lnSpc>
-            </a:pPr>
-            <a:r>
-              <a:rPr sz="1100" b="0">
-                <a:solidFill>
-                  <a:srgbClr val="94A3B8"/>
-                </a:solidFill>
-                <a:latin typeface="PingFang SC"/>
-              </a:rPr>
-              <a:t>terminal — 平台实测</a:t>
-            </a:r>
-          </a:p>
-        </p:txBody>
-      </p:sp>
-      <p:sp>
-        <p:nvSpPr>
-          <p:cNvPr id="12" name="TextBox 11"/>
-          <p:cNvSpPr txBox="1"/>
-          <p:nvPr/>
-        </p:nvSpPr>
-        <p:spPr>
-          <a:xfrm>
-            <a:off x="1562100" y="1485900"/>
-            <a:ext cx="9067800" cy="4381500"/>
-          </a:xfrm>
-          <a:prstGeom prst="rect">
-            <a:avLst/>
-          </a:prstGeom>
-          <a:noFill/>
-        </p:spPr>
-        <p:txBody>
-          <a:bodyPr wrap="square">
-            <a:spAutoFit/>
-          </a:bodyPr>
-          <a:lstStyle/>
-          <a:p>
-            <a:pPr>
-              <a:lnSpc>
-                <a:spcPct val="115000"/>
-              </a:lnSpc>
-            </a:pPr>
-            <a:r>
-              <a:rPr sz="1300">
-                <a:solidFill>
-                  <a:srgbClr val="CBD5E1"/>
-                </a:solidFill>
-                <a:latin typeface="Menlo"/>
-              </a:rPr>
-              <a:t>风控栈配置实录</a:t>
-            </a:r>
-          </a:p>
-        </p:txBody>
-      </p:sp>
-      <p:sp>
-        <p:nvSpPr>
-          <p:cNvPr id="13" name="TextBox 12"/>
-          <p:cNvSpPr txBox="1"/>
-          <p:nvPr/>
-        </p:nvSpPr>
-        <p:spPr>
-          <a:xfrm>
-            <a:off x="10287000" y="6534150"/>
-            <a:ext cx="1619250" cy="266700"/>
-          </a:xfrm>
-          <a:prstGeom prst="rect">
-            <a:avLst/>
-          </a:prstGeom>
-          <a:noFill/>
-        </p:spPr>
-        <p:txBody>
-          <a:bodyPr wrap="square" anchor="ctr">
-            <a:spAutoFit/>
-          </a:bodyPr>
-          <a:lstStyle/>
-          <a:p>
-            <a:pPr algn="r">
-              <a:lnSpc>
-                <a:spcPct val="100000"/>
-              </a:lnSpc>
-            </a:pPr>
-            <a:r>
               <a:rPr sz="900" b="0">
                 <a:solidFill>
                   <a:srgbClr val="94A3B8"/>
@@ -6310,7 +6351,7 @@
       </p:sp>
       <p:sp>
         <p:nvSpPr>
-          <p:cNvPr id="14" name="TextBox 13"/>
+          <p:cNvPr id="13" name="TextBox 12"/>
           <p:cNvSpPr txBox="1"/>
           <p:nvPr/>
         </p:nvSpPr>
@@ -9669,7 +9710,7 @@
                 </a:solidFill>
                 <a:latin typeface="PingFang SC"/>
               </a:rPr>
-              <a:t>6. 取消分支|确认记录进审计</a:t>
+              <a:t>6. 取消分支</a:t>
             </a:r>
           </a:p>
         </p:txBody>
@@ -11935,14 +11976,368 @@
       </p:sp>
       <p:sp>
         <p:nvSpPr>
-          <p:cNvPr id="5" name="TextBox 4"/>
+          <p:cNvPr id="5" name="Rounded Rectangle 4"/>
+          <p:cNvSpPr/>
+          <p:nvPr/>
+        </p:nvSpPr>
+        <p:spPr>
+          <a:xfrm>
+            <a:off x="1333500" y="1047750"/>
+            <a:ext cx="9525000" cy="2381250"/>
+          </a:xfrm>
+          <a:prstGeom prst="roundRect">
+            <a:avLst>
+              <a:gd name="adj" fmla="val 8000"/>
+            </a:avLst>
+          </a:prstGeom>
+          <a:solidFill>
+            <a:srgbClr val="0D1117"/>
+          </a:solidFill>
+          <a:ln>
+            <a:noFill/>
+          </a:ln>
+          <a:effectLst/>
+        </p:spPr>
+        <p:style>
+          <a:lnRef idx="1">
+            <a:schemeClr val="accent1"/>
+          </a:lnRef>
+          <a:fillRef idx="3">
+            <a:schemeClr val="accent1"/>
+          </a:fillRef>
+          <a:effectRef idx="2">
+            <a:schemeClr val="accent1"/>
+          </a:effectRef>
+          <a:fontRef idx="minor">
+            <a:schemeClr val="lt1"/>
+          </a:fontRef>
+        </p:style>
+        <p:txBody>
+          <a:bodyPr rtlCol="0" anchor="ctr"/>
+          <a:lstStyle/>
+          <a:p>
+            <a:pPr algn="ctr"/>
+          </a:p>
+        </p:txBody>
+      </p:sp>
+      <p:sp>
+        <p:nvSpPr>
+          <p:cNvPr id="6" name="Rectangle 5"/>
+          <p:cNvSpPr/>
+          <p:nvPr/>
+        </p:nvSpPr>
+        <p:spPr>
+          <a:xfrm>
+            <a:off x="1333500" y="1047750"/>
+            <a:ext cx="9525000" cy="381000"/>
+          </a:xfrm>
+          <a:prstGeom prst="rect">
+            <a:avLst/>
+          </a:prstGeom>
+          <a:solidFill>
+            <a:srgbClr val="1F2937"/>
+          </a:solidFill>
+          <a:ln>
+            <a:noFill/>
+          </a:ln>
+          <a:effectLst/>
+        </p:spPr>
+        <p:style>
+          <a:lnRef idx="1">
+            <a:schemeClr val="accent1"/>
+          </a:lnRef>
+          <a:fillRef idx="3">
+            <a:schemeClr val="accent1"/>
+          </a:fillRef>
+          <a:effectRef idx="2">
+            <a:schemeClr val="accent1"/>
+          </a:effectRef>
+          <a:fontRef idx="minor">
+            <a:schemeClr val="lt1"/>
+          </a:fontRef>
+        </p:style>
+        <p:txBody>
+          <a:bodyPr rtlCol="0" anchor="ctr"/>
+          <a:lstStyle/>
+          <a:p>
+            <a:pPr algn="ctr"/>
+          </a:p>
+        </p:txBody>
+      </p:sp>
+      <p:sp>
+        <p:nvSpPr>
+          <p:cNvPr id="7" name="Rounded Rectangle 6"/>
+          <p:cNvSpPr/>
+          <p:nvPr/>
+        </p:nvSpPr>
+        <p:spPr>
+          <a:xfrm>
+            <a:off x="1504950" y="1181100"/>
+            <a:ext cx="123825" cy="123825"/>
+          </a:xfrm>
+          <a:prstGeom prst="roundRect">
+            <a:avLst>
+              <a:gd name="adj" fmla="val 8000"/>
+            </a:avLst>
+          </a:prstGeom>
+          <a:solidFill>
+            <a:srgbClr val="F87171"/>
+          </a:solidFill>
+          <a:ln>
+            <a:noFill/>
+          </a:ln>
+          <a:effectLst/>
+        </p:spPr>
+        <p:style>
+          <a:lnRef idx="1">
+            <a:schemeClr val="accent1"/>
+          </a:lnRef>
+          <a:fillRef idx="3">
+            <a:schemeClr val="accent1"/>
+          </a:fillRef>
+          <a:effectRef idx="2">
+            <a:schemeClr val="accent1"/>
+          </a:effectRef>
+          <a:fontRef idx="minor">
+            <a:schemeClr val="lt1"/>
+          </a:fontRef>
+        </p:style>
+        <p:txBody>
+          <a:bodyPr rtlCol="0" anchor="ctr"/>
+          <a:lstStyle/>
+          <a:p>
+            <a:pPr algn="ctr"/>
+          </a:p>
+        </p:txBody>
+      </p:sp>
+      <p:sp>
+        <p:nvSpPr>
+          <p:cNvPr id="8" name="Rounded Rectangle 7"/>
+          <p:cNvSpPr/>
+          <p:nvPr/>
+        </p:nvSpPr>
+        <p:spPr>
+          <a:xfrm>
+            <a:off x="1752600" y="1181100"/>
+            <a:ext cx="123825" cy="123825"/>
+          </a:xfrm>
+          <a:prstGeom prst="roundRect">
+            <a:avLst>
+              <a:gd name="adj" fmla="val 8000"/>
+            </a:avLst>
+          </a:prstGeom>
+          <a:solidFill>
+            <a:srgbClr val="F59E0B"/>
+          </a:solidFill>
+          <a:ln>
+            <a:noFill/>
+          </a:ln>
+          <a:effectLst/>
+        </p:spPr>
+        <p:style>
+          <a:lnRef idx="1">
+            <a:schemeClr val="accent1"/>
+          </a:lnRef>
+          <a:fillRef idx="3">
+            <a:schemeClr val="accent1"/>
+          </a:fillRef>
+          <a:effectRef idx="2">
+            <a:schemeClr val="accent1"/>
+          </a:effectRef>
+          <a:fontRef idx="minor">
+            <a:schemeClr val="lt1"/>
+          </a:fontRef>
+        </p:style>
+        <p:txBody>
+          <a:bodyPr rtlCol="0" anchor="ctr"/>
+          <a:lstStyle/>
+          <a:p>
+            <a:pPr algn="ctr"/>
+          </a:p>
+        </p:txBody>
+      </p:sp>
+      <p:sp>
+        <p:nvSpPr>
+          <p:cNvPr id="9" name="Rounded Rectangle 8"/>
+          <p:cNvSpPr/>
+          <p:nvPr/>
+        </p:nvSpPr>
+        <p:spPr>
+          <a:xfrm>
+            <a:off x="2000250" y="1181100"/>
+            <a:ext cx="123825" cy="123825"/>
+          </a:xfrm>
+          <a:prstGeom prst="roundRect">
+            <a:avLst>
+              <a:gd name="adj" fmla="val 8000"/>
+            </a:avLst>
+          </a:prstGeom>
+          <a:solidFill>
+            <a:srgbClr val="34D399"/>
+          </a:solidFill>
+          <a:ln>
+            <a:noFill/>
+          </a:ln>
+          <a:effectLst/>
+        </p:spPr>
+        <p:style>
+          <a:lnRef idx="1">
+            <a:schemeClr val="accent1"/>
+          </a:lnRef>
+          <a:fillRef idx="3">
+            <a:schemeClr val="accent1"/>
+          </a:fillRef>
+          <a:effectRef idx="2">
+            <a:schemeClr val="accent1"/>
+          </a:effectRef>
+          <a:fontRef idx="minor">
+            <a:schemeClr val="lt1"/>
+          </a:fontRef>
+        </p:style>
+        <p:txBody>
+          <a:bodyPr rtlCol="0" anchor="ctr"/>
+          <a:lstStyle/>
+          <a:p>
+            <a:pPr algn="ctr"/>
+          </a:p>
+        </p:txBody>
+      </p:sp>
+      <p:sp>
+        <p:nvSpPr>
+          <p:cNvPr id="10" name="TextBox 9"/>
           <p:cNvSpPr txBox="1"/>
           <p:nvPr/>
         </p:nvSpPr>
         <p:spPr>
           <a:xfrm>
-            <a:off x="9334500" y="0"/>
-            <a:ext cx="2667000" cy="704850"/>
+            <a:off x="2381250" y="1047750"/>
+            <a:ext cx="8286750" cy="381000"/>
+          </a:xfrm>
+          <a:prstGeom prst="rect">
+            <a:avLst/>
+          </a:prstGeom>
+          <a:noFill/>
+        </p:spPr>
+        <p:txBody>
+          <a:bodyPr wrap="square" anchor="ctr">
+            <a:spAutoFit/>
+          </a:bodyPr>
+          <a:lstStyle/>
+          <a:p>
+            <a:pPr algn="l">
+              <a:lnSpc>
+                <a:spcPct val="100000"/>
+              </a:lnSpc>
+            </a:pPr>
+            <a:r>
+              <a:rPr sz="1100" b="0">
+                <a:solidFill>
+                  <a:srgbClr val="94A3B8"/>
+                </a:solidFill>
+                <a:latin typeface="PingFang SC"/>
+              </a:rPr>
+              <a:t>terminal — 平台实测</a:t>
+            </a:r>
+          </a:p>
+        </p:txBody>
+      </p:sp>
+      <p:sp>
+        <p:nvSpPr>
+          <p:cNvPr id="11" name="TextBox 10"/>
+          <p:cNvSpPr txBox="1"/>
+          <p:nvPr/>
+        </p:nvSpPr>
+        <p:spPr>
+          <a:xfrm>
+            <a:off x="1562100" y="1581150"/>
+            <a:ext cx="9067800" cy="1714500"/>
+          </a:xfrm>
+          <a:prstGeom prst="rect">
+            <a:avLst/>
+          </a:prstGeom>
+          <a:noFill/>
+        </p:spPr>
+        <p:txBody>
+          <a:bodyPr wrap="square">
+            <a:spAutoFit/>
+          </a:bodyPr>
+          <a:lstStyle/>
+          <a:p>
+            <a:pPr>
+              <a:lnSpc>
+                <a:spcPct val="115000"/>
+              </a:lnSpc>
+            </a:pPr>
+            <a:r>
+              <a:rPr sz="1300" b="1">
+                <a:solidFill>
+                  <a:srgbClr val="34D399"/>
+                </a:solidFill>
+                <a:latin typeface="Menlo"/>
+              </a:rPr>
+              <a:t>$ executor.execute("query_user", {"api_key":"sk-xxx","q":"joel"})</a:t>
+            </a:r>
+          </a:p>
+          <a:p>
+            <a:pPr>
+              <a:lnSpc>
+                <a:spcPct val="115000"/>
+              </a:lnSpc>
+            </a:pPr>
+            <a:r>
+              <a:rPr sz="1300">
+                <a:solidFill>
+                  <a:srgbClr val="CBD5E1"/>
+                </a:solidFill>
+                <a:latin typeface="Menlo"/>
+              </a:rPr>
+              <a:t>AuditEvent(event_id="e1", run_id="r6", tool="query_user",args={"api_key": "***MASKED***", "q": "joel"}, ok=True)</a:t>
+            </a:r>
+          </a:p>
+          <a:p>
+            <a:pPr>
+              <a:lnSpc>
+                <a:spcPct val="115000"/>
+              </a:lnSpc>
+            </a:pPr>
+            <a:r>
+              <a:rPr sz="1300">
+                <a:solidFill>
+                  <a:srgbClr val="94A3B8"/>
+                </a:solidFill>
+                <a:latin typeface="Menlo"/>
+              </a:rPr>
+              <a:t># mask_args 声明的字段在审计层统一脱敏</a:t>
+            </a:r>
+          </a:p>
+          <a:p>
+            <a:pPr>
+              <a:lnSpc>
+                <a:spcPct val="115000"/>
+              </a:lnSpc>
+            </a:pPr>
+            <a:r>
+              <a:rPr sz="1300">
+                <a:solidFill>
+                  <a:srgbClr val="94A3B8"/>
+                </a:solidFill>
+                <a:latin typeface="Menlo"/>
+              </a:rPr>
+              <a:t># meta.chain_hash 哈希链防篡改(v1.3)</a:t>
+            </a:r>
+          </a:p>
+        </p:txBody>
+      </p:sp>
+      <p:sp>
+        <p:nvSpPr>
+          <p:cNvPr id="12" name="TextBox 11"/>
+          <p:cNvSpPr txBox="1"/>
+          <p:nvPr/>
+        </p:nvSpPr>
+        <p:spPr>
+          <a:xfrm>
+            <a:off x="10287000" y="6534150"/>
+            <a:ext cx="1619250" cy="266700"/>
           </a:xfrm>
           <a:prstGeom prst="rect">
             <a:avLst/>
@@ -11961,399 +12356,6 @@
               </a:lnSpc>
             </a:pPr>
             <a:r>
-              <a:rPr sz="1100" b="0">
-                <a:solidFill>
-                  <a:srgbClr val="94A3B8"/>
-                </a:solidFill>
-                <a:latin typeface="PingFang SC"/>
-              </a:rPr>
-              <a:t>$ executor.execute("query_user", {"api_key":"sk-xxx","q":"joel"});AuditEvent(event_id="e1", run_id="r6", tool="query_user",args={"api_key": "***MASKED***", "q": "joel"}, ok=True);# mask_args 声明的字段在审计层统一脱敏;# meta.chain_hash 哈希链防篡改(v1.3)|InMemoryAuditBus 真实输出</a:t>
-            </a:r>
-          </a:p>
-        </p:txBody>
-      </p:sp>
-      <p:sp>
-        <p:nvSpPr>
-          <p:cNvPr id="6" name="Rounded Rectangle 5"/>
-          <p:cNvSpPr/>
-          <p:nvPr/>
-        </p:nvSpPr>
-        <p:spPr>
-          <a:xfrm>
-            <a:off x="1333500" y="952500"/>
-            <a:ext cx="9525000" cy="5048250"/>
-          </a:xfrm>
-          <a:prstGeom prst="roundRect">
-            <a:avLst>
-              <a:gd name="adj" fmla="val 8000"/>
-            </a:avLst>
-          </a:prstGeom>
-          <a:solidFill>
-            <a:srgbClr val="0D1117"/>
-          </a:solidFill>
-          <a:ln>
-            <a:noFill/>
-          </a:ln>
-          <a:effectLst/>
-        </p:spPr>
-        <p:style>
-          <a:lnRef idx="1">
-            <a:schemeClr val="accent1"/>
-          </a:lnRef>
-          <a:fillRef idx="3">
-            <a:schemeClr val="accent1"/>
-          </a:fillRef>
-          <a:effectRef idx="2">
-            <a:schemeClr val="accent1"/>
-          </a:effectRef>
-          <a:fontRef idx="minor">
-            <a:schemeClr val="lt1"/>
-          </a:fontRef>
-        </p:style>
-        <p:txBody>
-          <a:bodyPr rtlCol="0" anchor="ctr"/>
-          <a:lstStyle/>
-          <a:p>
-            <a:pPr algn="ctr"/>
-          </a:p>
-        </p:txBody>
-      </p:sp>
-      <p:sp>
-        <p:nvSpPr>
-          <p:cNvPr id="7" name="Rectangle 6"/>
-          <p:cNvSpPr/>
-          <p:nvPr/>
-        </p:nvSpPr>
-        <p:spPr>
-          <a:xfrm>
-            <a:off x="1333500" y="952500"/>
-            <a:ext cx="9525000" cy="381000"/>
-          </a:xfrm>
-          <a:prstGeom prst="rect">
-            <a:avLst/>
-          </a:prstGeom>
-          <a:solidFill>
-            <a:srgbClr val="1F2937"/>
-          </a:solidFill>
-          <a:ln>
-            <a:noFill/>
-          </a:ln>
-          <a:effectLst/>
-        </p:spPr>
-        <p:style>
-          <a:lnRef idx="1">
-            <a:schemeClr val="accent1"/>
-          </a:lnRef>
-          <a:fillRef idx="3">
-            <a:schemeClr val="accent1"/>
-          </a:fillRef>
-          <a:effectRef idx="2">
-            <a:schemeClr val="accent1"/>
-          </a:effectRef>
-          <a:fontRef idx="minor">
-            <a:schemeClr val="lt1"/>
-          </a:fontRef>
-        </p:style>
-        <p:txBody>
-          <a:bodyPr rtlCol="0" anchor="ctr"/>
-          <a:lstStyle/>
-          <a:p>
-            <a:pPr algn="ctr"/>
-          </a:p>
-        </p:txBody>
-      </p:sp>
-      <p:sp>
-        <p:nvSpPr>
-          <p:cNvPr id="8" name="Rounded Rectangle 7"/>
-          <p:cNvSpPr/>
-          <p:nvPr/>
-        </p:nvSpPr>
-        <p:spPr>
-          <a:xfrm>
-            <a:off x="1504950" y="1085850"/>
-            <a:ext cx="123825" cy="123825"/>
-          </a:xfrm>
-          <a:prstGeom prst="roundRect">
-            <a:avLst>
-              <a:gd name="adj" fmla="val 8000"/>
-            </a:avLst>
-          </a:prstGeom>
-          <a:solidFill>
-            <a:srgbClr val="F87171"/>
-          </a:solidFill>
-          <a:ln>
-            <a:noFill/>
-          </a:ln>
-          <a:effectLst/>
-        </p:spPr>
-        <p:style>
-          <a:lnRef idx="1">
-            <a:schemeClr val="accent1"/>
-          </a:lnRef>
-          <a:fillRef idx="3">
-            <a:schemeClr val="accent1"/>
-          </a:fillRef>
-          <a:effectRef idx="2">
-            <a:schemeClr val="accent1"/>
-          </a:effectRef>
-          <a:fontRef idx="minor">
-            <a:schemeClr val="lt1"/>
-          </a:fontRef>
-        </p:style>
-        <p:txBody>
-          <a:bodyPr rtlCol="0" anchor="ctr"/>
-          <a:lstStyle/>
-          <a:p>
-            <a:pPr algn="ctr"/>
-          </a:p>
-        </p:txBody>
-      </p:sp>
-      <p:sp>
-        <p:nvSpPr>
-          <p:cNvPr id="9" name="Rounded Rectangle 8"/>
-          <p:cNvSpPr/>
-          <p:nvPr/>
-        </p:nvSpPr>
-        <p:spPr>
-          <a:xfrm>
-            <a:off x="1752600" y="1085850"/>
-            <a:ext cx="123825" cy="123825"/>
-          </a:xfrm>
-          <a:prstGeom prst="roundRect">
-            <a:avLst>
-              <a:gd name="adj" fmla="val 8000"/>
-            </a:avLst>
-          </a:prstGeom>
-          <a:solidFill>
-            <a:srgbClr val="F59E0B"/>
-          </a:solidFill>
-          <a:ln>
-            <a:noFill/>
-          </a:ln>
-          <a:effectLst/>
-        </p:spPr>
-        <p:style>
-          <a:lnRef idx="1">
-            <a:schemeClr val="accent1"/>
-          </a:lnRef>
-          <a:fillRef idx="3">
-            <a:schemeClr val="accent1"/>
-          </a:fillRef>
-          <a:effectRef idx="2">
-            <a:schemeClr val="accent1"/>
-          </a:effectRef>
-          <a:fontRef idx="minor">
-            <a:schemeClr val="lt1"/>
-          </a:fontRef>
-        </p:style>
-        <p:txBody>
-          <a:bodyPr rtlCol="0" anchor="ctr"/>
-          <a:lstStyle/>
-          <a:p>
-            <a:pPr algn="ctr"/>
-          </a:p>
-        </p:txBody>
-      </p:sp>
-      <p:sp>
-        <p:nvSpPr>
-          <p:cNvPr id="10" name="Rounded Rectangle 9"/>
-          <p:cNvSpPr/>
-          <p:nvPr/>
-        </p:nvSpPr>
-        <p:spPr>
-          <a:xfrm>
-            <a:off x="2000250" y="1085850"/>
-            <a:ext cx="123825" cy="123825"/>
-          </a:xfrm>
-          <a:prstGeom prst="roundRect">
-            <a:avLst>
-              <a:gd name="adj" fmla="val 8000"/>
-            </a:avLst>
-          </a:prstGeom>
-          <a:solidFill>
-            <a:srgbClr val="34D399"/>
-          </a:solidFill>
-          <a:ln>
-            <a:noFill/>
-          </a:ln>
-          <a:effectLst/>
-        </p:spPr>
-        <p:style>
-          <a:lnRef idx="1">
-            <a:schemeClr val="accent1"/>
-          </a:lnRef>
-          <a:fillRef idx="3">
-            <a:schemeClr val="accent1"/>
-          </a:fillRef>
-          <a:effectRef idx="2">
-            <a:schemeClr val="accent1"/>
-          </a:effectRef>
-          <a:fontRef idx="minor">
-            <a:schemeClr val="lt1"/>
-          </a:fontRef>
-        </p:style>
-        <p:txBody>
-          <a:bodyPr rtlCol="0" anchor="ctr"/>
-          <a:lstStyle/>
-          <a:p>
-            <a:pPr algn="ctr"/>
-          </a:p>
-        </p:txBody>
-      </p:sp>
-      <p:sp>
-        <p:nvSpPr>
-          <p:cNvPr id="11" name="TextBox 10"/>
-          <p:cNvSpPr txBox="1"/>
-          <p:nvPr/>
-        </p:nvSpPr>
-        <p:spPr>
-          <a:xfrm>
-            <a:off x="2381250" y="952500"/>
-            <a:ext cx="8286750" cy="381000"/>
-          </a:xfrm>
-          <a:prstGeom prst="rect">
-            <a:avLst/>
-          </a:prstGeom>
-          <a:noFill/>
-        </p:spPr>
-        <p:txBody>
-          <a:bodyPr wrap="square" anchor="ctr">
-            <a:spAutoFit/>
-          </a:bodyPr>
-          <a:lstStyle/>
-          <a:p>
-            <a:pPr algn="l">
-              <a:lnSpc>
-                <a:spcPct val="100000"/>
-              </a:lnSpc>
-            </a:pPr>
-            <a:r>
-              <a:rPr sz="1100" b="0">
-                <a:solidFill>
-                  <a:srgbClr val="94A3B8"/>
-                </a:solidFill>
-                <a:latin typeface="PingFang SC"/>
-              </a:rPr>
-              <a:t>terminal — 平台实测</a:t>
-            </a:r>
-          </a:p>
-        </p:txBody>
-      </p:sp>
-      <p:sp>
-        <p:nvSpPr>
-          <p:cNvPr id="12" name="TextBox 11"/>
-          <p:cNvSpPr txBox="1"/>
-          <p:nvPr/>
-        </p:nvSpPr>
-        <p:spPr>
-          <a:xfrm>
-            <a:off x="1562100" y="1485900"/>
-            <a:ext cx="9067800" cy="4381500"/>
-          </a:xfrm>
-          <a:prstGeom prst="rect">
-            <a:avLst/>
-          </a:prstGeom>
-          <a:noFill/>
-        </p:spPr>
-        <p:txBody>
-          <a:bodyPr wrap="square">
-            <a:spAutoFit/>
-          </a:bodyPr>
-          <a:lstStyle/>
-          <a:p>
-            <a:pPr>
-              <a:lnSpc>
-                <a:spcPct val="115000"/>
-              </a:lnSpc>
-            </a:pPr>
-            <a:r>
-              <a:rPr sz="1300" b="1">
-                <a:solidFill>
-                  <a:srgbClr val="34D399"/>
-                </a:solidFill>
-                <a:latin typeface="Menlo"/>
-              </a:rPr>
-              <a:t>$ executor.execute("query_user", {"api_key":"sk-xxx","q":"joel"})</a:t>
-            </a:r>
-          </a:p>
-          <a:p>
-            <a:pPr>
-              <a:lnSpc>
-                <a:spcPct val="115000"/>
-              </a:lnSpc>
-            </a:pPr>
-            <a:r>
-              <a:rPr sz="1300">
-                <a:solidFill>
-                  <a:srgbClr val="CBD5E1"/>
-                </a:solidFill>
-                <a:latin typeface="Menlo"/>
-              </a:rPr>
-              <a:t>AuditEvent(event_id="e1", run_id="r6", tool="query_user",args={"api_key": "***MASKED***", "q": "joel"}, ok=True)</a:t>
-            </a:r>
-          </a:p>
-          <a:p>
-            <a:pPr>
-              <a:lnSpc>
-                <a:spcPct val="115000"/>
-              </a:lnSpc>
-            </a:pPr>
-            <a:r>
-              <a:rPr sz="1300">
-                <a:solidFill>
-                  <a:srgbClr val="94A3B8"/>
-                </a:solidFill>
-                <a:latin typeface="Menlo"/>
-              </a:rPr>
-              <a:t># mask_args 声明的字段在审计层统一脱敏</a:t>
-            </a:r>
-          </a:p>
-          <a:p>
-            <a:pPr>
-              <a:lnSpc>
-                <a:spcPct val="115000"/>
-              </a:lnSpc>
-            </a:pPr>
-            <a:r>
-              <a:rPr sz="1300">
-                <a:solidFill>
-                  <a:srgbClr val="94A3B8"/>
-                </a:solidFill>
-                <a:latin typeface="Menlo"/>
-              </a:rPr>
-              <a:t># meta.chain_hash 哈希链防篡改(v1.3)</a:t>
-            </a:r>
-          </a:p>
-        </p:txBody>
-      </p:sp>
-      <p:sp>
-        <p:nvSpPr>
-          <p:cNvPr id="13" name="TextBox 12"/>
-          <p:cNvSpPr txBox="1"/>
-          <p:nvPr/>
-        </p:nvSpPr>
-        <p:spPr>
-          <a:xfrm>
-            <a:off x="10287000" y="6534150"/>
-            <a:ext cx="1619250" cy="266700"/>
-          </a:xfrm>
-          <a:prstGeom prst="rect">
-            <a:avLst/>
-          </a:prstGeom>
-          <a:noFill/>
-        </p:spPr>
-        <p:txBody>
-          <a:bodyPr wrap="square" anchor="ctr">
-            <a:spAutoFit/>
-          </a:bodyPr>
-          <a:lstStyle/>
-          <a:p>
-            <a:pPr algn="r">
-              <a:lnSpc>
-                <a:spcPct val="100000"/>
-              </a:lnSpc>
-            </a:pPr>
-            <a:r>
               <a:rPr sz="900" b="0">
                 <a:solidFill>
                   <a:srgbClr val="94A3B8"/>
@@ -12367,7 +12369,7 @@
       </p:sp>
       <p:sp>
         <p:nvSpPr>
-          <p:cNvPr id="14" name="TextBox 13"/>
+          <p:cNvPr id="13" name="TextBox 12"/>
           <p:cNvSpPr txBox="1"/>
           <p:nvPr/>
         </p:nvSpPr>
@@ -15152,14 +15154,641 @@
       </p:sp>
       <p:sp>
         <p:nvSpPr>
-          <p:cNvPr id="5" name="TextBox 4"/>
+          <p:cNvPr id="5" name="Rounded Rectangle 4"/>
+          <p:cNvSpPr/>
+          <p:nvPr/>
+        </p:nvSpPr>
+        <p:spPr>
+          <a:xfrm>
+            <a:off x="1047750" y="1905000"/>
+            <a:ext cx="3175000" cy="2857500"/>
+          </a:xfrm>
+          <a:prstGeom prst="roundRect">
+            <a:avLst>
+              <a:gd name="adj" fmla="val 8000"/>
+            </a:avLst>
+          </a:prstGeom>
+          <a:solidFill>
+            <a:srgbClr val="FFFFFF"/>
+          </a:solidFill>
+          <a:ln w="12700">
+            <a:solidFill>
+              <a:srgbClr val="DDE5EE"/>
+            </a:solidFill>
+          </a:ln>
+          <a:effectLst/>
+        </p:spPr>
+        <p:style>
+          <a:lnRef idx="1">
+            <a:schemeClr val="accent1"/>
+          </a:lnRef>
+          <a:fillRef idx="3">
+            <a:schemeClr val="accent1"/>
+          </a:fillRef>
+          <a:effectRef idx="2">
+            <a:schemeClr val="accent1"/>
+          </a:effectRef>
+          <a:fontRef idx="minor">
+            <a:schemeClr val="lt1"/>
+          </a:fontRef>
+        </p:style>
+        <p:txBody>
+          <a:bodyPr rtlCol="0" anchor="ctr"/>
+          <a:lstStyle/>
+          <a:p>
+            <a:pPr algn="ctr"/>
+          </a:p>
+        </p:txBody>
+      </p:sp>
+      <p:sp>
+        <p:nvSpPr>
+          <p:cNvPr id="6" name="Rectangle 5"/>
+          <p:cNvSpPr/>
+          <p:nvPr/>
+        </p:nvSpPr>
+        <p:spPr>
+          <a:xfrm>
+            <a:off x="1047750" y="1905000"/>
+            <a:ext cx="3175000" cy="76200"/>
+          </a:xfrm>
+          <a:prstGeom prst="rect">
+            <a:avLst/>
+          </a:prstGeom>
+          <a:solidFill>
+            <a:srgbClr val="2563EB"/>
+          </a:solidFill>
+          <a:ln>
+            <a:noFill/>
+          </a:ln>
+          <a:effectLst/>
+        </p:spPr>
+        <p:style>
+          <a:lnRef idx="1">
+            <a:schemeClr val="accent1"/>
+          </a:lnRef>
+          <a:fillRef idx="3">
+            <a:schemeClr val="accent1"/>
+          </a:fillRef>
+          <a:effectRef idx="2">
+            <a:schemeClr val="accent1"/>
+          </a:effectRef>
+          <a:fontRef idx="minor">
+            <a:schemeClr val="lt1"/>
+          </a:fontRef>
+        </p:style>
+        <p:txBody>
+          <a:bodyPr rtlCol="0" anchor="ctr"/>
+          <a:lstStyle/>
+          <a:p>
+            <a:pPr algn="ctr"/>
+          </a:p>
+        </p:txBody>
+      </p:sp>
+      <p:sp>
+        <p:nvSpPr>
+          <p:cNvPr id="7" name="TextBox 6"/>
           <p:cNvSpPr txBox="1"/>
           <p:nvPr/>
         </p:nvSpPr>
         <p:spPr>
           <a:xfrm>
-            <a:off x="9334500" y="0"/>
-            <a:ext cx="2667000" cy="704850"/>
+            <a:off x="1047750" y="2286000"/>
+            <a:ext cx="3175000" cy="1047750"/>
+          </a:xfrm>
+          <a:prstGeom prst="rect">
+            <a:avLst/>
+          </a:prstGeom>
+          <a:noFill/>
+        </p:spPr>
+        <p:txBody>
+          <a:bodyPr wrap="square" anchor="ctr">
+            <a:spAutoFit/>
+          </a:bodyPr>
+          <a:lstStyle/>
+          <a:p>
+            <a:pPr algn="ctr">
+              <a:lnSpc>
+                <a:spcPct val="100000"/>
+              </a:lnSpc>
+            </a:pPr>
+            <a:r>
+              <a:rPr sz="4000" b="1">
+                <a:solidFill>
+                  <a:srgbClr val="2563EB"/>
+                </a:solidFill>
+                <a:latin typeface="PingFang SC"/>
+              </a:rPr>
+              <a:t>100%</a:t>
+            </a:r>
+          </a:p>
+        </p:txBody>
+      </p:sp>
+      <p:sp>
+        <p:nvSpPr>
+          <p:cNvPr id="8" name="TextBox 7"/>
+          <p:cNvSpPr txBox="1"/>
+          <p:nvPr/>
+        </p:nvSpPr>
+        <p:spPr>
+          <a:xfrm>
+            <a:off x="1047750" y="3333750"/>
+            <a:ext cx="3175000" cy="323850"/>
+          </a:xfrm>
+          <a:prstGeom prst="rect">
+            <a:avLst/>
+          </a:prstGeom>
+          <a:noFill/>
+        </p:spPr>
+        <p:txBody>
+          <a:bodyPr wrap="square" anchor="ctr">
+            <a:spAutoFit/>
+          </a:bodyPr>
+          <a:lstStyle/>
+          <a:p>
+            <a:pPr algn="ctr">
+              <a:lnSpc>
+                <a:spcPct val="100000"/>
+              </a:lnSpc>
+            </a:pPr>
+            <a:r>
+              <a:rPr sz="1300" b="0">
+                <a:solidFill>
+                  <a:srgbClr val="94A3B8"/>
+                </a:solidFill>
+                <a:latin typeface="PingFang SC"/>
+              </a:rPr>
+              <a:t>高危拦截率</a:t>
+            </a:r>
+          </a:p>
+        </p:txBody>
+      </p:sp>
+      <p:sp>
+        <p:nvSpPr>
+          <p:cNvPr id="9" name="TextBox 8"/>
+          <p:cNvSpPr txBox="1"/>
+          <p:nvPr/>
+        </p:nvSpPr>
+        <p:spPr>
+          <a:xfrm>
+            <a:off x="1200150" y="4057650"/>
+            <a:ext cx="2870200" cy="571500"/>
+          </a:xfrm>
+          <a:prstGeom prst="rect">
+            <a:avLst/>
+          </a:prstGeom>
+          <a:noFill/>
+        </p:spPr>
+        <p:txBody>
+          <a:bodyPr wrap="square" anchor="ctr">
+            <a:spAutoFit/>
+          </a:bodyPr>
+          <a:lstStyle/>
+          <a:p>
+            <a:pPr algn="ctr">
+              <a:lnSpc>
+                <a:spcPct val="100000"/>
+              </a:lnSpc>
+            </a:pPr>
+            <a:r>
+              <a:rPr sz="1300" b="1">
+                <a:solidFill>
+                  <a:srgbClr val="475569"/>
+                </a:solidFill>
+                <a:latin typeface="PingFang SC"/>
+              </a:rPr>
+              <a:t>实测</a:t>
+            </a:r>
+          </a:p>
+        </p:txBody>
+      </p:sp>
+      <p:sp>
+        <p:nvSpPr>
+          <p:cNvPr id="10" name="Rounded Rectangle 9"/>
+          <p:cNvSpPr/>
+          <p:nvPr/>
+        </p:nvSpPr>
+        <p:spPr>
+          <a:xfrm>
+            <a:off x="4508500" y="1905000"/>
+            <a:ext cx="3175000" cy="2857500"/>
+          </a:xfrm>
+          <a:prstGeom prst="roundRect">
+            <a:avLst>
+              <a:gd name="adj" fmla="val 8000"/>
+            </a:avLst>
+          </a:prstGeom>
+          <a:solidFill>
+            <a:srgbClr val="FFFFFF"/>
+          </a:solidFill>
+          <a:ln w="12700">
+            <a:solidFill>
+              <a:srgbClr val="DDE5EE"/>
+            </a:solidFill>
+          </a:ln>
+          <a:effectLst/>
+        </p:spPr>
+        <p:style>
+          <a:lnRef idx="1">
+            <a:schemeClr val="accent1"/>
+          </a:lnRef>
+          <a:fillRef idx="3">
+            <a:schemeClr val="accent1"/>
+          </a:fillRef>
+          <a:effectRef idx="2">
+            <a:schemeClr val="accent1"/>
+          </a:effectRef>
+          <a:fontRef idx="minor">
+            <a:schemeClr val="lt1"/>
+          </a:fontRef>
+        </p:style>
+        <p:txBody>
+          <a:bodyPr rtlCol="0" anchor="ctr"/>
+          <a:lstStyle/>
+          <a:p>
+            <a:pPr algn="ctr"/>
+          </a:p>
+        </p:txBody>
+      </p:sp>
+      <p:sp>
+        <p:nvSpPr>
+          <p:cNvPr id="11" name="Rectangle 10"/>
+          <p:cNvSpPr/>
+          <p:nvPr/>
+        </p:nvSpPr>
+        <p:spPr>
+          <a:xfrm>
+            <a:off x="4508500" y="1905000"/>
+            <a:ext cx="3175000" cy="76200"/>
+          </a:xfrm>
+          <a:prstGeom prst="rect">
+            <a:avLst/>
+          </a:prstGeom>
+          <a:solidFill>
+            <a:srgbClr val="14B8A6"/>
+          </a:solidFill>
+          <a:ln>
+            <a:noFill/>
+          </a:ln>
+          <a:effectLst/>
+        </p:spPr>
+        <p:style>
+          <a:lnRef idx="1">
+            <a:schemeClr val="accent1"/>
+          </a:lnRef>
+          <a:fillRef idx="3">
+            <a:schemeClr val="accent1"/>
+          </a:fillRef>
+          <a:effectRef idx="2">
+            <a:schemeClr val="accent1"/>
+          </a:effectRef>
+          <a:fontRef idx="minor">
+            <a:schemeClr val="lt1"/>
+          </a:fontRef>
+        </p:style>
+        <p:txBody>
+          <a:bodyPr rtlCol="0" anchor="ctr"/>
+          <a:lstStyle/>
+          <a:p>
+            <a:pPr algn="ctr"/>
+          </a:p>
+        </p:txBody>
+      </p:sp>
+      <p:sp>
+        <p:nvSpPr>
+          <p:cNvPr id="12" name="TextBox 11"/>
+          <p:cNvSpPr txBox="1"/>
+          <p:nvPr/>
+        </p:nvSpPr>
+        <p:spPr>
+          <a:xfrm>
+            <a:off x="4508500" y="2286000"/>
+            <a:ext cx="3175000" cy="1047750"/>
+          </a:xfrm>
+          <a:prstGeom prst="rect">
+            <a:avLst/>
+          </a:prstGeom>
+          <a:noFill/>
+        </p:spPr>
+        <p:txBody>
+          <a:bodyPr wrap="square" anchor="ctr">
+            <a:spAutoFit/>
+          </a:bodyPr>
+          <a:lstStyle/>
+          <a:p>
+            <a:pPr algn="ctr">
+              <a:lnSpc>
+                <a:spcPct val="100000"/>
+              </a:lnSpc>
+            </a:pPr>
+            <a:r>
+              <a:rPr sz="4000" b="1">
+                <a:solidFill>
+                  <a:srgbClr val="14B8A6"/>
+                </a:solidFill>
+                <a:latin typeface="PingFang SC"/>
+              </a:rPr>
+              <a:t>0</a:t>
+            </a:r>
+          </a:p>
+        </p:txBody>
+      </p:sp>
+      <p:sp>
+        <p:nvSpPr>
+          <p:cNvPr id="13" name="TextBox 12"/>
+          <p:cNvSpPr txBox="1"/>
+          <p:nvPr/>
+        </p:nvSpPr>
+        <p:spPr>
+          <a:xfrm>
+            <a:off x="4508500" y="3333750"/>
+            <a:ext cx="3175000" cy="323850"/>
+          </a:xfrm>
+          <a:prstGeom prst="rect">
+            <a:avLst/>
+          </a:prstGeom>
+          <a:noFill/>
+        </p:spPr>
+        <p:txBody>
+          <a:bodyPr wrap="square" anchor="ctr">
+            <a:spAutoFit/>
+          </a:bodyPr>
+          <a:lstStyle/>
+          <a:p>
+            <a:pPr algn="ctr">
+              <a:lnSpc>
+                <a:spcPct val="100000"/>
+              </a:lnSpc>
+            </a:pPr>
+            <a:r>
+              <a:rPr sz="1300" b="0">
+                <a:solidFill>
+                  <a:srgbClr val="94A3B8"/>
+                </a:solidFill>
+                <a:latin typeface="PingFang SC"/>
+              </a:rPr>
+              <a:t>密钥泄露</a:t>
+            </a:r>
+          </a:p>
+        </p:txBody>
+      </p:sp>
+      <p:sp>
+        <p:nvSpPr>
+          <p:cNvPr id="14" name="TextBox 13"/>
+          <p:cNvSpPr txBox="1"/>
+          <p:nvPr/>
+        </p:nvSpPr>
+        <p:spPr>
+          <a:xfrm>
+            <a:off x="4660900" y="4057650"/>
+            <a:ext cx="2870200" cy="571500"/>
+          </a:xfrm>
+          <a:prstGeom prst="rect">
+            <a:avLst/>
+          </a:prstGeom>
+          <a:noFill/>
+        </p:spPr>
+        <p:txBody>
+          <a:bodyPr wrap="square" anchor="ctr">
+            <a:spAutoFit/>
+          </a:bodyPr>
+          <a:lstStyle/>
+          <a:p>
+            <a:pPr algn="ctr">
+              <a:lnSpc>
+                <a:spcPct val="100000"/>
+              </a:lnSpc>
+            </a:pPr>
+            <a:r>
+              <a:rPr sz="1300" b="1">
+                <a:solidFill>
+                  <a:srgbClr val="475569"/>
+                </a:solidFill>
+                <a:latin typeface="PingFang SC"/>
+              </a:rPr>
+              <a:t>审计日志</a:t>
+            </a:r>
+          </a:p>
+        </p:txBody>
+      </p:sp>
+      <p:sp>
+        <p:nvSpPr>
+          <p:cNvPr id="15" name="Rounded Rectangle 14"/>
+          <p:cNvSpPr/>
+          <p:nvPr/>
+        </p:nvSpPr>
+        <p:spPr>
+          <a:xfrm>
+            <a:off x="7969250" y="1905000"/>
+            <a:ext cx="3175000" cy="2857500"/>
+          </a:xfrm>
+          <a:prstGeom prst="roundRect">
+            <a:avLst>
+              <a:gd name="adj" fmla="val 8000"/>
+            </a:avLst>
+          </a:prstGeom>
+          <a:solidFill>
+            <a:srgbClr val="FFFFFF"/>
+          </a:solidFill>
+          <a:ln w="12700">
+            <a:solidFill>
+              <a:srgbClr val="DDE5EE"/>
+            </a:solidFill>
+          </a:ln>
+          <a:effectLst/>
+        </p:spPr>
+        <p:style>
+          <a:lnRef idx="1">
+            <a:schemeClr val="accent1"/>
+          </a:lnRef>
+          <a:fillRef idx="3">
+            <a:schemeClr val="accent1"/>
+          </a:fillRef>
+          <a:effectRef idx="2">
+            <a:schemeClr val="accent1"/>
+          </a:effectRef>
+          <a:fontRef idx="minor">
+            <a:schemeClr val="lt1"/>
+          </a:fontRef>
+        </p:style>
+        <p:txBody>
+          <a:bodyPr rtlCol="0" anchor="ctr"/>
+          <a:lstStyle/>
+          <a:p>
+            <a:pPr algn="ctr"/>
+          </a:p>
+        </p:txBody>
+      </p:sp>
+      <p:sp>
+        <p:nvSpPr>
+          <p:cNvPr id="16" name="Rectangle 15"/>
+          <p:cNvSpPr/>
+          <p:nvPr/>
+        </p:nvSpPr>
+        <p:spPr>
+          <a:xfrm>
+            <a:off x="7969250" y="1905000"/>
+            <a:ext cx="3175000" cy="76200"/>
+          </a:xfrm>
+          <a:prstGeom prst="rect">
+            <a:avLst/>
+          </a:prstGeom>
+          <a:solidFill>
+            <a:srgbClr val="8B5CF6"/>
+          </a:solidFill>
+          <a:ln>
+            <a:noFill/>
+          </a:ln>
+          <a:effectLst/>
+        </p:spPr>
+        <p:style>
+          <a:lnRef idx="1">
+            <a:schemeClr val="accent1"/>
+          </a:lnRef>
+          <a:fillRef idx="3">
+            <a:schemeClr val="accent1"/>
+          </a:fillRef>
+          <a:effectRef idx="2">
+            <a:schemeClr val="accent1"/>
+          </a:effectRef>
+          <a:fontRef idx="minor">
+            <a:schemeClr val="lt1"/>
+          </a:fontRef>
+        </p:style>
+        <p:txBody>
+          <a:bodyPr rtlCol="0" anchor="ctr"/>
+          <a:lstStyle/>
+          <a:p>
+            <a:pPr algn="ctr"/>
+          </a:p>
+        </p:txBody>
+      </p:sp>
+      <p:sp>
+        <p:nvSpPr>
+          <p:cNvPr id="17" name="TextBox 16"/>
+          <p:cNvSpPr txBox="1"/>
+          <p:nvPr/>
+        </p:nvSpPr>
+        <p:spPr>
+          <a:xfrm>
+            <a:off x="7969250" y="2286000"/>
+            <a:ext cx="3175000" cy="1047750"/>
+          </a:xfrm>
+          <a:prstGeom prst="rect">
+            <a:avLst/>
+          </a:prstGeom>
+          <a:noFill/>
+        </p:spPr>
+        <p:txBody>
+          <a:bodyPr wrap="square" anchor="ctr">
+            <a:spAutoFit/>
+          </a:bodyPr>
+          <a:lstStyle/>
+          <a:p>
+            <a:pPr algn="ctr">
+              <a:lnSpc>
+                <a:spcPct val="100000"/>
+              </a:lnSpc>
+            </a:pPr>
+            <a:r>
+              <a:rPr sz="4000" b="1">
+                <a:solidFill>
+                  <a:srgbClr val="8B5CF6"/>
+                </a:solidFill>
+                <a:latin typeface="PingFang SC"/>
+              </a:rPr>
+              <a:t>8</a:t>
+            </a:r>
+          </a:p>
+        </p:txBody>
+      </p:sp>
+      <p:sp>
+        <p:nvSpPr>
+          <p:cNvPr id="18" name="TextBox 17"/>
+          <p:cNvSpPr txBox="1"/>
+          <p:nvPr/>
+        </p:nvSpPr>
+        <p:spPr>
+          <a:xfrm>
+            <a:off x="7969250" y="3333750"/>
+            <a:ext cx="3175000" cy="323850"/>
+          </a:xfrm>
+          <a:prstGeom prst="rect">
+            <a:avLst/>
+          </a:prstGeom>
+          <a:noFill/>
+        </p:spPr>
+        <p:txBody>
+          <a:bodyPr wrap="square" anchor="ctr">
+            <a:spAutoFit/>
+          </a:bodyPr>
+          <a:lstStyle/>
+          <a:p>
+            <a:pPr algn="ctr">
+              <a:lnSpc>
+                <a:spcPct val="100000"/>
+              </a:lnSpc>
+            </a:pPr>
+            <a:r>
+              <a:rPr sz="1300" b="0">
+                <a:solidFill>
+                  <a:srgbClr val="94A3B8"/>
+                </a:solidFill>
+                <a:latin typeface="PingFang SC"/>
+              </a:rPr>
+              <a:t>脱敏字段</a:t>
+            </a:r>
+          </a:p>
+        </p:txBody>
+      </p:sp>
+      <p:sp>
+        <p:nvSpPr>
+          <p:cNvPr id="19" name="TextBox 18"/>
+          <p:cNvSpPr txBox="1"/>
+          <p:nvPr/>
+        </p:nvSpPr>
+        <p:spPr>
+          <a:xfrm>
+            <a:off x="8121650" y="4057650"/>
+            <a:ext cx="2870200" cy="571500"/>
+          </a:xfrm>
+          <a:prstGeom prst="rect">
+            <a:avLst/>
+          </a:prstGeom>
+          <a:noFill/>
+        </p:spPr>
+        <p:txBody>
+          <a:bodyPr wrap="square" anchor="ctr">
+            <a:spAutoFit/>
+          </a:bodyPr>
+          <a:lstStyle/>
+          <a:p>
+            <a:pPr algn="ctr">
+              <a:lnSpc>
+                <a:spcPct val="100000"/>
+              </a:lnSpc>
+            </a:pPr>
+            <a:r>
+              <a:rPr sz="1300" b="1">
+                <a:solidFill>
+                  <a:srgbClr val="475569"/>
+                </a:solidFill>
+                <a:latin typeface="PingFang SC"/>
+              </a:rPr>
+              <a:t>mask_args 机制</a:t>
+            </a:r>
+          </a:p>
+        </p:txBody>
+      </p:sp>
+      <p:sp>
+        <p:nvSpPr>
+          <p:cNvPr id="20" name="TextBox 19"/>
+          <p:cNvSpPr txBox="1"/>
+          <p:nvPr/>
+        </p:nvSpPr>
+        <p:spPr>
+          <a:xfrm>
+            <a:off x="10287000" y="6534150"/>
+            <a:ext cx="1619250" cy="266700"/>
           </a:xfrm>
           <a:prstGeom prst="rect">
             <a:avLst/>
@@ -15178,672 +15807,6 @@
               </a:lnSpc>
             </a:pPr>
             <a:r>
-              <a:rPr sz="1100" b="0">
-                <a:solidFill>
-                  <a:srgbClr val="94A3B8"/>
-                </a:solidFill>
-                <a:latin typeface="PingFang SC"/>
-              </a:rPr>
-              <a:t>100%^高危拦截率^实测;0^密钥泄露^审计日志;8^脱敏字段^mask_args 机制|+哈希链防篡改(v1.3)</a:t>
-            </a:r>
-          </a:p>
-        </p:txBody>
-      </p:sp>
-      <p:sp>
-        <p:nvSpPr>
-          <p:cNvPr id="6" name="Rounded Rectangle 5"/>
-          <p:cNvSpPr/>
-          <p:nvPr/>
-        </p:nvSpPr>
-        <p:spPr>
-          <a:xfrm>
-            <a:off x="1047750" y="1905000"/>
-            <a:ext cx="3175000" cy="2857500"/>
-          </a:xfrm>
-          <a:prstGeom prst="roundRect">
-            <a:avLst>
-              <a:gd name="adj" fmla="val 8000"/>
-            </a:avLst>
-          </a:prstGeom>
-          <a:solidFill>
-            <a:srgbClr val="FFFFFF"/>
-          </a:solidFill>
-          <a:ln w="12700">
-            <a:solidFill>
-              <a:srgbClr val="DDE5EE"/>
-            </a:solidFill>
-          </a:ln>
-          <a:effectLst/>
-        </p:spPr>
-        <p:style>
-          <a:lnRef idx="1">
-            <a:schemeClr val="accent1"/>
-          </a:lnRef>
-          <a:fillRef idx="3">
-            <a:schemeClr val="accent1"/>
-          </a:fillRef>
-          <a:effectRef idx="2">
-            <a:schemeClr val="accent1"/>
-          </a:effectRef>
-          <a:fontRef idx="minor">
-            <a:schemeClr val="lt1"/>
-          </a:fontRef>
-        </p:style>
-        <p:txBody>
-          <a:bodyPr rtlCol="0" anchor="ctr"/>
-          <a:lstStyle/>
-          <a:p>
-            <a:pPr algn="ctr"/>
-          </a:p>
-        </p:txBody>
-      </p:sp>
-      <p:sp>
-        <p:nvSpPr>
-          <p:cNvPr id="7" name="Rectangle 6"/>
-          <p:cNvSpPr/>
-          <p:nvPr/>
-        </p:nvSpPr>
-        <p:spPr>
-          <a:xfrm>
-            <a:off x="1047750" y="1905000"/>
-            <a:ext cx="3175000" cy="76200"/>
-          </a:xfrm>
-          <a:prstGeom prst="rect">
-            <a:avLst/>
-          </a:prstGeom>
-          <a:solidFill>
-            <a:srgbClr val="2563EB"/>
-          </a:solidFill>
-          <a:ln>
-            <a:noFill/>
-          </a:ln>
-          <a:effectLst/>
-        </p:spPr>
-        <p:style>
-          <a:lnRef idx="1">
-            <a:schemeClr val="accent1"/>
-          </a:lnRef>
-          <a:fillRef idx="3">
-            <a:schemeClr val="accent1"/>
-          </a:fillRef>
-          <a:effectRef idx="2">
-            <a:schemeClr val="accent1"/>
-          </a:effectRef>
-          <a:fontRef idx="minor">
-            <a:schemeClr val="lt1"/>
-          </a:fontRef>
-        </p:style>
-        <p:txBody>
-          <a:bodyPr rtlCol="0" anchor="ctr"/>
-          <a:lstStyle/>
-          <a:p>
-            <a:pPr algn="ctr"/>
-          </a:p>
-        </p:txBody>
-      </p:sp>
-      <p:sp>
-        <p:nvSpPr>
-          <p:cNvPr id="8" name="TextBox 7"/>
-          <p:cNvSpPr txBox="1"/>
-          <p:nvPr/>
-        </p:nvSpPr>
-        <p:spPr>
-          <a:xfrm>
-            <a:off x="1047750" y="2286000"/>
-            <a:ext cx="3175000" cy="1047750"/>
-          </a:xfrm>
-          <a:prstGeom prst="rect">
-            <a:avLst/>
-          </a:prstGeom>
-          <a:noFill/>
-        </p:spPr>
-        <p:txBody>
-          <a:bodyPr wrap="square" anchor="ctr">
-            <a:spAutoFit/>
-          </a:bodyPr>
-          <a:lstStyle/>
-          <a:p>
-            <a:pPr algn="ctr">
-              <a:lnSpc>
-                <a:spcPct val="100000"/>
-              </a:lnSpc>
-            </a:pPr>
-            <a:r>
-              <a:rPr sz="4000" b="1">
-                <a:solidFill>
-                  <a:srgbClr val="2563EB"/>
-                </a:solidFill>
-                <a:latin typeface="PingFang SC"/>
-              </a:rPr>
-              <a:t>100%</a:t>
-            </a:r>
-          </a:p>
-        </p:txBody>
-      </p:sp>
-      <p:sp>
-        <p:nvSpPr>
-          <p:cNvPr id="9" name="TextBox 8"/>
-          <p:cNvSpPr txBox="1"/>
-          <p:nvPr/>
-        </p:nvSpPr>
-        <p:spPr>
-          <a:xfrm>
-            <a:off x="1047750" y="3333750"/>
-            <a:ext cx="3175000" cy="323850"/>
-          </a:xfrm>
-          <a:prstGeom prst="rect">
-            <a:avLst/>
-          </a:prstGeom>
-          <a:noFill/>
-        </p:spPr>
-        <p:txBody>
-          <a:bodyPr wrap="square" anchor="ctr">
-            <a:spAutoFit/>
-          </a:bodyPr>
-          <a:lstStyle/>
-          <a:p>
-            <a:pPr algn="ctr">
-              <a:lnSpc>
-                <a:spcPct val="100000"/>
-              </a:lnSpc>
-            </a:pPr>
-            <a:r>
-              <a:rPr sz="1300" b="0">
-                <a:solidFill>
-                  <a:srgbClr val="94A3B8"/>
-                </a:solidFill>
-                <a:latin typeface="PingFang SC"/>
-              </a:rPr>
-              <a:t>高危拦截率</a:t>
-            </a:r>
-          </a:p>
-        </p:txBody>
-      </p:sp>
-      <p:sp>
-        <p:nvSpPr>
-          <p:cNvPr id="10" name="TextBox 9"/>
-          <p:cNvSpPr txBox="1"/>
-          <p:nvPr/>
-        </p:nvSpPr>
-        <p:spPr>
-          <a:xfrm>
-            <a:off x="1200150" y="4057650"/>
-            <a:ext cx="2870200" cy="571500"/>
-          </a:xfrm>
-          <a:prstGeom prst="rect">
-            <a:avLst/>
-          </a:prstGeom>
-          <a:noFill/>
-        </p:spPr>
-        <p:txBody>
-          <a:bodyPr wrap="square" anchor="ctr">
-            <a:spAutoFit/>
-          </a:bodyPr>
-          <a:lstStyle/>
-          <a:p>
-            <a:pPr algn="ctr">
-              <a:lnSpc>
-                <a:spcPct val="100000"/>
-              </a:lnSpc>
-            </a:pPr>
-            <a:r>
-              <a:rPr sz="1300" b="1">
-                <a:solidFill>
-                  <a:srgbClr val="475569"/>
-                </a:solidFill>
-                <a:latin typeface="PingFang SC"/>
-              </a:rPr>
-              <a:t>实测</a:t>
-            </a:r>
-          </a:p>
-        </p:txBody>
-      </p:sp>
-      <p:sp>
-        <p:nvSpPr>
-          <p:cNvPr id="11" name="Rounded Rectangle 10"/>
-          <p:cNvSpPr/>
-          <p:nvPr/>
-        </p:nvSpPr>
-        <p:spPr>
-          <a:xfrm>
-            <a:off x="4508500" y="1905000"/>
-            <a:ext cx="3175000" cy="2857500"/>
-          </a:xfrm>
-          <a:prstGeom prst="roundRect">
-            <a:avLst>
-              <a:gd name="adj" fmla="val 8000"/>
-            </a:avLst>
-          </a:prstGeom>
-          <a:solidFill>
-            <a:srgbClr val="FFFFFF"/>
-          </a:solidFill>
-          <a:ln w="12700">
-            <a:solidFill>
-              <a:srgbClr val="DDE5EE"/>
-            </a:solidFill>
-          </a:ln>
-          <a:effectLst/>
-        </p:spPr>
-        <p:style>
-          <a:lnRef idx="1">
-            <a:schemeClr val="accent1"/>
-          </a:lnRef>
-          <a:fillRef idx="3">
-            <a:schemeClr val="accent1"/>
-          </a:fillRef>
-          <a:effectRef idx="2">
-            <a:schemeClr val="accent1"/>
-          </a:effectRef>
-          <a:fontRef idx="minor">
-            <a:schemeClr val="lt1"/>
-          </a:fontRef>
-        </p:style>
-        <p:txBody>
-          <a:bodyPr rtlCol="0" anchor="ctr"/>
-          <a:lstStyle/>
-          <a:p>
-            <a:pPr algn="ctr"/>
-          </a:p>
-        </p:txBody>
-      </p:sp>
-      <p:sp>
-        <p:nvSpPr>
-          <p:cNvPr id="12" name="Rectangle 11"/>
-          <p:cNvSpPr/>
-          <p:nvPr/>
-        </p:nvSpPr>
-        <p:spPr>
-          <a:xfrm>
-            <a:off x="4508500" y="1905000"/>
-            <a:ext cx="3175000" cy="76200"/>
-          </a:xfrm>
-          <a:prstGeom prst="rect">
-            <a:avLst/>
-          </a:prstGeom>
-          <a:solidFill>
-            <a:srgbClr val="14B8A6"/>
-          </a:solidFill>
-          <a:ln>
-            <a:noFill/>
-          </a:ln>
-          <a:effectLst/>
-        </p:spPr>
-        <p:style>
-          <a:lnRef idx="1">
-            <a:schemeClr val="accent1"/>
-          </a:lnRef>
-          <a:fillRef idx="3">
-            <a:schemeClr val="accent1"/>
-          </a:fillRef>
-          <a:effectRef idx="2">
-            <a:schemeClr val="accent1"/>
-          </a:effectRef>
-          <a:fontRef idx="minor">
-            <a:schemeClr val="lt1"/>
-          </a:fontRef>
-        </p:style>
-        <p:txBody>
-          <a:bodyPr rtlCol="0" anchor="ctr"/>
-          <a:lstStyle/>
-          <a:p>
-            <a:pPr algn="ctr"/>
-          </a:p>
-        </p:txBody>
-      </p:sp>
-      <p:sp>
-        <p:nvSpPr>
-          <p:cNvPr id="13" name="TextBox 12"/>
-          <p:cNvSpPr txBox="1"/>
-          <p:nvPr/>
-        </p:nvSpPr>
-        <p:spPr>
-          <a:xfrm>
-            <a:off x="4508500" y="2286000"/>
-            <a:ext cx="3175000" cy="1047750"/>
-          </a:xfrm>
-          <a:prstGeom prst="rect">
-            <a:avLst/>
-          </a:prstGeom>
-          <a:noFill/>
-        </p:spPr>
-        <p:txBody>
-          <a:bodyPr wrap="square" anchor="ctr">
-            <a:spAutoFit/>
-          </a:bodyPr>
-          <a:lstStyle/>
-          <a:p>
-            <a:pPr algn="ctr">
-              <a:lnSpc>
-                <a:spcPct val="100000"/>
-              </a:lnSpc>
-            </a:pPr>
-            <a:r>
-              <a:rPr sz="4000" b="1">
-                <a:solidFill>
-                  <a:srgbClr val="14B8A6"/>
-                </a:solidFill>
-                <a:latin typeface="PingFang SC"/>
-              </a:rPr>
-              <a:t>0</a:t>
-            </a:r>
-          </a:p>
-        </p:txBody>
-      </p:sp>
-      <p:sp>
-        <p:nvSpPr>
-          <p:cNvPr id="14" name="TextBox 13"/>
-          <p:cNvSpPr txBox="1"/>
-          <p:nvPr/>
-        </p:nvSpPr>
-        <p:spPr>
-          <a:xfrm>
-            <a:off x="4508500" y="3333750"/>
-            <a:ext cx="3175000" cy="323850"/>
-          </a:xfrm>
-          <a:prstGeom prst="rect">
-            <a:avLst/>
-          </a:prstGeom>
-          <a:noFill/>
-        </p:spPr>
-        <p:txBody>
-          <a:bodyPr wrap="square" anchor="ctr">
-            <a:spAutoFit/>
-          </a:bodyPr>
-          <a:lstStyle/>
-          <a:p>
-            <a:pPr algn="ctr">
-              <a:lnSpc>
-                <a:spcPct val="100000"/>
-              </a:lnSpc>
-            </a:pPr>
-            <a:r>
-              <a:rPr sz="1300" b="0">
-                <a:solidFill>
-                  <a:srgbClr val="94A3B8"/>
-                </a:solidFill>
-                <a:latin typeface="PingFang SC"/>
-              </a:rPr>
-              <a:t>密钥泄露</a:t>
-            </a:r>
-          </a:p>
-        </p:txBody>
-      </p:sp>
-      <p:sp>
-        <p:nvSpPr>
-          <p:cNvPr id="15" name="TextBox 14"/>
-          <p:cNvSpPr txBox="1"/>
-          <p:nvPr/>
-        </p:nvSpPr>
-        <p:spPr>
-          <a:xfrm>
-            <a:off x="4660900" y="4057650"/>
-            <a:ext cx="2870200" cy="571500"/>
-          </a:xfrm>
-          <a:prstGeom prst="rect">
-            <a:avLst/>
-          </a:prstGeom>
-          <a:noFill/>
-        </p:spPr>
-        <p:txBody>
-          <a:bodyPr wrap="square" anchor="ctr">
-            <a:spAutoFit/>
-          </a:bodyPr>
-          <a:lstStyle/>
-          <a:p>
-            <a:pPr algn="ctr">
-              <a:lnSpc>
-                <a:spcPct val="100000"/>
-              </a:lnSpc>
-            </a:pPr>
-            <a:r>
-              <a:rPr sz="1300" b="1">
-                <a:solidFill>
-                  <a:srgbClr val="475569"/>
-                </a:solidFill>
-                <a:latin typeface="PingFang SC"/>
-              </a:rPr>
-              <a:t>审计日志</a:t>
-            </a:r>
-          </a:p>
-        </p:txBody>
-      </p:sp>
-      <p:sp>
-        <p:nvSpPr>
-          <p:cNvPr id="16" name="Rounded Rectangle 15"/>
-          <p:cNvSpPr/>
-          <p:nvPr/>
-        </p:nvSpPr>
-        <p:spPr>
-          <a:xfrm>
-            <a:off x="7969250" y="1905000"/>
-            <a:ext cx="3175000" cy="2857500"/>
-          </a:xfrm>
-          <a:prstGeom prst="roundRect">
-            <a:avLst>
-              <a:gd name="adj" fmla="val 8000"/>
-            </a:avLst>
-          </a:prstGeom>
-          <a:solidFill>
-            <a:srgbClr val="FFFFFF"/>
-          </a:solidFill>
-          <a:ln w="12700">
-            <a:solidFill>
-              <a:srgbClr val="DDE5EE"/>
-            </a:solidFill>
-          </a:ln>
-          <a:effectLst/>
-        </p:spPr>
-        <p:style>
-          <a:lnRef idx="1">
-            <a:schemeClr val="accent1"/>
-          </a:lnRef>
-          <a:fillRef idx="3">
-            <a:schemeClr val="accent1"/>
-          </a:fillRef>
-          <a:effectRef idx="2">
-            <a:schemeClr val="accent1"/>
-          </a:effectRef>
-          <a:fontRef idx="minor">
-            <a:schemeClr val="lt1"/>
-          </a:fontRef>
-        </p:style>
-        <p:txBody>
-          <a:bodyPr rtlCol="0" anchor="ctr"/>
-          <a:lstStyle/>
-          <a:p>
-            <a:pPr algn="ctr"/>
-          </a:p>
-        </p:txBody>
-      </p:sp>
-      <p:sp>
-        <p:nvSpPr>
-          <p:cNvPr id="17" name="Rectangle 16"/>
-          <p:cNvSpPr/>
-          <p:nvPr/>
-        </p:nvSpPr>
-        <p:spPr>
-          <a:xfrm>
-            <a:off x="7969250" y="1905000"/>
-            <a:ext cx="3175000" cy="76200"/>
-          </a:xfrm>
-          <a:prstGeom prst="rect">
-            <a:avLst/>
-          </a:prstGeom>
-          <a:solidFill>
-            <a:srgbClr val="8B5CF6"/>
-          </a:solidFill>
-          <a:ln>
-            <a:noFill/>
-          </a:ln>
-          <a:effectLst/>
-        </p:spPr>
-        <p:style>
-          <a:lnRef idx="1">
-            <a:schemeClr val="accent1"/>
-          </a:lnRef>
-          <a:fillRef idx="3">
-            <a:schemeClr val="accent1"/>
-          </a:fillRef>
-          <a:effectRef idx="2">
-            <a:schemeClr val="accent1"/>
-          </a:effectRef>
-          <a:fontRef idx="minor">
-            <a:schemeClr val="lt1"/>
-          </a:fontRef>
-        </p:style>
-        <p:txBody>
-          <a:bodyPr rtlCol="0" anchor="ctr"/>
-          <a:lstStyle/>
-          <a:p>
-            <a:pPr algn="ctr"/>
-          </a:p>
-        </p:txBody>
-      </p:sp>
-      <p:sp>
-        <p:nvSpPr>
-          <p:cNvPr id="18" name="TextBox 17"/>
-          <p:cNvSpPr txBox="1"/>
-          <p:nvPr/>
-        </p:nvSpPr>
-        <p:spPr>
-          <a:xfrm>
-            <a:off x="7969250" y="2286000"/>
-            <a:ext cx="3175000" cy="1047750"/>
-          </a:xfrm>
-          <a:prstGeom prst="rect">
-            <a:avLst/>
-          </a:prstGeom>
-          <a:noFill/>
-        </p:spPr>
-        <p:txBody>
-          <a:bodyPr wrap="square" anchor="ctr">
-            <a:spAutoFit/>
-          </a:bodyPr>
-          <a:lstStyle/>
-          <a:p>
-            <a:pPr algn="ctr">
-              <a:lnSpc>
-                <a:spcPct val="100000"/>
-              </a:lnSpc>
-            </a:pPr>
-            <a:r>
-              <a:rPr sz="4000" b="1">
-                <a:solidFill>
-                  <a:srgbClr val="8B5CF6"/>
-                </a:solidFill>
-                <a:latin typeface="PingFang SC"/>
-              </a:rPr>
-              <a:t>8</a:t>
-            </a:r>
-          </a:p>
-        </p:txBody>
-      </p:sp>
-      <p:sp>
-        <p:nvSpPr>
-          <p:cNvPr id="19" name="TextBox 18"/>
-          <p:cNvSpPr txBox="1"/>
-          <p:nvPr/>
-        </p:nvSpPr>
-        <p:spPr>
-          <a:xfrm>
-            <a:off x="7969250" y="3333750"/>
-            <a:ext cx="3175000" cy="323850"/>
-          </a:xfrm>
-          <a:prstGeom prst="rect">
-            <a:avLst/>
-          </a:prstGeom>
-          <a:noFill/>
-        </p:spPr>
-        <p:txBody>
-          <a:bodyPr wrap="square" anchor="ctr">
-            <a:spAutoFit/>
-          </a:bodyPr>
-          <a:lstStyle/>
-          <a:p>
-            <a:pPr algn="ctr">
-              <a:lnSpc>
-                <a:spcPct val="100000"/>
-              </a:lnSpc>
-            </a:pPr>
-            <a:r>
-              <a:rPr sz="1300" b="0">
-                <a:solidFill>
-                  <a:srgbClr val="94A3B8"/>
-                </a:solidFill>
-                <a:latin typeface="PingFang SC"/>
-              </a:rPr>
-              <a:t>脱敏字段</a:t>
-            </a:r>
-          </a:p>
-        </p:txBody>
-      </p:sp>
-      <p:sp>
-        <p:nvSpPr>
-          <p:cNvPr id="20" name="TextBox 19"/>
-          <p:cNvSpPr txBox="1"/>
-          <p:nvPr/>
-        </p:nvSpPr>
-        <p:spPr>
-          <a:xfrm>
-            <a:off x="8121650" y="4057650"/>
-            <a:ext cx="2870200" cy="571500"/>
-          </a:xfrm>
-          <a:prstGeom prst="rect">
-            <a:avLst/>
-          </a:prstGeom>
-          <a:noFill/>
-        </p:spPr>
-        <p:txBody>
-          <a:bodyPr wrap="square" anchor="ctr">
-            <a:spAutoFit/>
-          </a:bodyPr>
-          <a:lstStyle/>
-          <a:p>
-            <a:pPr algn="ctr">
-              <a:lnSpc>
-                <a:spcPct val="100000"/>
-              </a:lnSpc>
-            </a:pPr>
-            <a:r>
-              <a:rPr sz="1300" b="1">
-                <a:solidFill>
-                  <a:srgbClr val="475569"/>
-                </a:solidFill>
-                <a:latin typeface="PingFang SC"/>
-              </a:rPr>
-              <a:t>mask_args 机制|+哈希链防篡改(v1.3)</a:t>
-            </a:r>
-          </a:p>
-        </p:txBody>
-      </p:sp>
-      <p:sp>
-        <p:nvSpPr>
-          <p:cNvPr id="21" name="TextBox 20"/>
-          <p:cNvSpPr txBox="1"/>
-          <p:nvPr/>
-        </p:nvSpPr>
-        <p:spPr>
-          <a:xfrm>
-            <a:off x="10287000" y="6534150"/>
-            <a:ext cx="1619250" cy="266700"/>
-          </a:xfrm>
-          <a:prstGeom prst="rect">
-            <a:avLst/>
-          </a:prstGeom>
-          <a:noFill/>
-        </p:spPr>
-        <p:txBody>
-          <a:bodyPr wrap="square" anchor="ctr">
-            <a:spAutoFit/>
-          </a:bodyPr>
-          <a:lstStyle/>
-          <a:p>
-            <a:pPr algn="r">
-              <a:lnSpc>
-                <a:spcPct val="100000"/>
-              </a:lnSpc>
-            </a:pPr>
-            <a:r>
               <a:rPr sz="900" b="0">
                 <a:solidFill>
                   <a:srgbClr val="94A3B8"/>
@@ -15857,7 +15820,7 @@
       </p:sp>
       <p:sp>
         <p:nvSpPr>
-          <p:cNvPr id="22" name="TextBox 21"/>
+          <p:cNvPr id="21" name="TextBox 20"/>
           <p:cNvSpPr txBox="1"/>
           <p:nvPr/>
         </p:nvSpPr>
@@ -27893,8 +27856,8 @@
         </p:nvSpPr>
         <p:spPr>
           <a:xfrm>
-            <a:off x="2524125" y="1905000"/>
-            <a:ext cx="2228850" cy="1047750"/>
+            <a:off x="1698625" y="2000250"/>
+            <a:ext cx="2190750" cy="552450"/>
           </a:xfrm>
           <a:prstGeom prst="roundRect">
             <a:avLst>
@@ -27941,8 +27904,8 @@
         </p:nvSpPr>
         <p:spPr>
           <a:xfrm>
-            <a:off x="2524125" y="1905000"/>
-            <a:ext cx="2228850" cy="1047750"/>
+            <a:off x="1698625" y="2000250"/>
+            <a:ext cx="2190750" cy="552450"/>
           </a:xfrm>
           <a:prstGeom prst="rect">
             <a:avLst/>
@@ -27963,7 +27926,7 @@
             <a:r>
               <a:rPr sz="1300" b="1">
                 <a:solidFill>
-                  <a:srgbClr val="475569"/>
+                  <a:srgbClr val="0B1D3A"/>
                 </a:solidFill>
                 <a:latin typeface="PingFang SC"/>
               </a:rPr>
@@ -27980,8 +27943,8 @@
         </p:nvSpPr>
         <p:spPr>
           <a:xfrm>
-            <a:off x="4905375" y="1905000"/>
-            <a:ext cx="2228850" cy="1047750"/>
+            <a:off x="5000625" y="2000250"/>
+            <a:ext cx="2190750" cy="552450"/>
           </a:xfrm>
           <a:prstGeom prst="roundRect">
             <a:avLst>
@@ -28028,8 +27991,8 @@
         </p:nvSpPr>
         <p:spPr>
           <a:xfrm>
-            <a:off x="4905375" y="1905000"/>
-            <a:ext cx="2228850" cy="1047750"/>
+            <a:off x="5000625" y="2000250"/>
+            <a:ext cx="2190750" cy="552450"/>
           </a:xfrm>
           <a:prstGeom prst="rect">
             <a:avLst/>
@@ -28050,7 +28013,7 @@
             <a:r>
               <a:rPr sz="1300" b="1">
                 <a:solidFill>
-                  <a:srgbClr val="475569"/>
+                  <a:srgbClr val="0B1D3A"/>
                 </a:solidFill>
                 <a:latin typeface="PingFang SC"/>
               </a:rPr>
@@ -28067,8 +28030,8 @@
         </p:nvSpPr>
         <p:spPr>
           <a:xfrm>
-            <a:off x="7286625" y="1905000"/>
-            <a:ext cx="2228850" cy="1047750"/>
+            <a:off x="8302625" y="2000250"/>
+            <a:ext cx="2190750" cy="552450"/>
           </a:xfrm>
           <a:prstGeom prst="roundRect">
             <a:avLst>
@@ -28115,8 +28078,8 @@
         </p:nvSpPr>
         <p:spPr>
           <a:xfrm>
-            <a:off x="7286625" y="1905000"/>
-            <a:ext cx="2228850" cy="1047750"/>
+            <a:off x="8302625" y="2000250"/>
+            <a:ext cx="2190750" cy="552450"/>
           </a:xfrm>
           <a:prstGeom prst="rect">
             <a:avLst/>
@@ -28137,7 +28100,7 @@
             <a:r>
               <a:rPr sz="1300" b="1">
                 <a:solidFill>
-                  <a:srgbClr val="475569"/>
+                  <a:srgbClr val="0B1D3A"/>
                 </a:solidFill>
                 <a:latin typeface="PingFang SC"/>
               </a:rPr>
@@ -28154,8 +28117,8 @@
         </p:nvSpPr>
         <p:spPr>
           <a:xfrm>
-            <a:off x="2524125" y="3524250"/>
-            <a:ext cx="2228850" cy="1047750"/>
+            <a:off x="1698625" y="3429000"/>
+            <a:ext cx="2190750" cy="552450"/>
           </a:xfrm>
           <a:prstGeom prst="roundRect">
             <a:avLst>
@@ -28202,8 +28165,8 @@
         </p:nvSpPr>
         <p:spPr>
           <a:xfrm>
-            <a:off x="2524125" y="3524250"/>
-            <a:ext cx="2228850" cy="1047750"/>
+            <a:off x="1698625" y="3429000"/>
+            <a:ext cx="2190750" cy="552450"/>
           </a:xfrm>
           <a:prstGeom prst="rect">
             <a:avLst/>
@@ -28224,7 +28187,7 @@
             <a:r>
               <a:rPr sz="1300" b="1">
                 <a:solidFill>
-                  <a:srgbClr val="475569"/>
+                  <a:srgbClr val="0B1D3A"/>
                 </a:solidFill>
                 <a:latin typeface="PingFang SC"/>
               </a:rPr>
@@ -28241,8 +28204,8 @@
         </p:nvSpPr>
         <p:spPr>
           <a:xfrm>
-            <a:off x="4905375" y="3524250"/>
-            <a:ext cx="2228850" cy="1047750"/>
+            <a:off x="5000625" y="3429000"/>
+            <a:ext cx="2190750" cy="552450"/>
           </a:xfrm>
           <a:prstGeom prst="roundRect">
             <a:avLst>
@@ -28289,8 +28252,8 @@
         </p:nvSpPr>
         <p:spPr>
           <a:xfrm>
-            <a:off x="4905375" y="3524250"/>
-            <a:ext cx="2228850" cy="1047750"/>
+            <a:off x="5000625" y="3429000"/>
+            <a:ext cx="2190750" cy="552450"/>
           </a:xfrm>
           <a:prstGeom prst="rect">
             <a:avLst/>
@@ -28311,7 +28274,7 @@
             <a:r>
               <a:rPr sz="1300" b="1">
                 <a:solidFill>
-                  <a:srgbClr val="475569"/>
+                  <a:srgbClr val="0B1D3A"/>
                 </a:solidFill>
                 <a:latin typeface="PingFang SC"/>
               </a:rPr>
@@ -28328,8 +28291,8 @@
         </p:nvSpPr>
         <p:spPr>
           <a:xfrm>
-            <a:off x="7286625" y="3524250"/>
-            <a:ext cx="2228850" cy="1047750"/>
+            <a:off x="8302625" y="3429000"/>
+            <a:ext cx="2190750" cy="552450"/>
           </a:xfrm>
           <a:prstGeom prst="roundRect">
             <a:avLst>
@@ -28376,8 +28339,8 @@
         </p:nvSpPr>
         <p:spPr>
           <a:xfrm>
-            <a:off x="7286625" y="3524250"/>
-            <a:ext cx="2228850" cy="1047750"/>
+            <a:off x="8302625" y="3429000"/>
+            <a:ext cx="2190750" cy="552450"/>
           </a:xfrm>
           <a:prstGeom prst="rect">
             <a:avLst/>
@@ -28398,7 +28361,7 @@
             <a:r>
               <a:rPr sz="1300" b="1">
                 <a:solidFill>
-                  <a:srgbClr val="475569"/>
+                  <a:srgbClr val="0B1D3A"/>
                 </a:solidFill>
                 <a:latin typeface="PingFang SC"/>
               </a:rPr>
@@ -28415,15 +28378,15 @@
         </p:nvCxnSpPr>
         <p:spPr>
           <a:xfrm>
-            <a:off x="4752975" y="2428875"/>
-            <a:ext cx="152400" cy="0"/>
+            <a:off x="3889375" y="2276475"/>
+            <a:ext cx="1044575" cy="0"/>
           </a:xfrm>
           <a:prstGeom prst="line">
             <a:avLst/>
           </a:prstGeom>
-          <a:ln w="17780">
+          <a:ln w="19050">
             <a:solidFill>
-              <a:srgbClr val="475569"/>
+              <a:srgbClr val="2563EB"/>
             </a:solidFill>
           </a:ln>
         </p:spPr>
@@ -28450,14 +28413,14 @@
         </p:nvSpPr>
         <p:spPr>
           <a:xfrm rot="5400000">
-            <a:off x="4819651" y="2386013"/>
+            <a:off x="4848226" y="2233613"/>
             <a:ext cx="85725" cy="85725"/>
           </a:xfrm>
           <a:prstGeom prst="triangle">
             <a:avLst/>
           </a:prstGeom>
           <a:solidFill>
-            <a:srgbClr val="475569"/>
+            <a:srgbClr val="2563EB"/>
           </a:solidFill>
           <a:ln>
             <a:noFill/>
@@ -28488,14 +28451,62 @@
       </p:sp>
       <p:sp>
         <p:nvSpPr>
-          <p:cNvPr id="19" name="TextBox 18"/>
+          <p:cNvPr id="19" name="Rounded Rectangle 18"/>
+          <p:cNvSpPr/>
+          <p:nvPr/>
+        </p:nvSpPr>
+        <p:spPr>
+          <a:xfrm>
+            <a:off x="3849687" y="2133600"/>
+            <a:ext cx="1123950" cy="285750"/>
+          </a:xfrm>
+          <a:prstGeom prst="roundRect">
+            <a:avLst>
+              <a:gd name="adj" fmla="val 8000"/>
+            </a:avLst>
+          </a:prstGeom>
+          <a:solidFill>
+            <a:srgbClr val="FFFFFF"/>
+          </a:solidFill>
+          <a:ln w="12700">
+            <a:solidFill>
+              <a:srgbClr val="DDE5EE"/>
+            </a:solidFill>
+          </a:ln>
+          <a:effectLst/>
+        </p:spPr>
+        <p:style>
+          <a:lnRef idx="1">
+            <a:schemeClr val="accent1"/>
+          </a:lnRef>
+          <a:fillRef idx="3">
+            <a:schemeClr val="accent1"/>
+          </a:fillRef>
+          <a:effectRef idx="2">
+            <a:schemeClr val="accent1"/>
+          </a:effectRef>
+          <a:fontRef idx="minor">
+            <a:schemeClr val="lt1"/>
+          </a:fontRef>
+        </p:style>
+        <p:txBody>
+          <a:bodyPr rtlCol="0" anchor="ctr"/>
+          <a:lstStyle/>
+          <a:p>
+            <a:pPr algn="ctr"/>
+          </a:p>
+        </p:txBody>
+      </p:sp>
+      <p:sp>
+        <p:nvSpPr>
+          <p:cNvPr id="20" name="TextBox 19"/>
           <p:cNvSpPr txBox="1"/>
           <p:nvPr/>
         </p:nvSpPr>
         <p:spPr>
           <a:xfrm>
-            <a:off x="3971925" y="2105025"/>
-            <a:ext cx="1714500" cy="228600"/>
+            <a:off x="3849687" y="2133600"/>
+            <a:ext cx="1123950" cy="285750"/>
           </a:xfrm>
           <a:prstGeom prst="rect">
             <a:avLst/>
@@ -28514,9 +28525,9 @@
               </a:lnSpc>
             </a:pPr>
             <a:r>
-              <a:rPr sz="900" b="0">
-                <a:solidFill>
-                  <a:srgbClr val="94A3B8"/>
+              <a:rPr sz="1100" b="1">
+                <a:solidFill>
+                  <a:srgbClr val="0B1D3A"/>
                 </a:solidFill>
                 <a:latin typeface="PingFang SC"/>
               </a:rPr>
@@ -28527,21 +28538,21 @@
       </p:sp>
       <p:cxnSp>
         <p:nvCxnSpPr>
-          <p:cNvPr id="20" name="Connector 19"/>
+          <p:cNvPr id="21" name="Connector 20"/>
           <p:cNvCxnSpPr/>
           <p:nvPr/>
         </p:nvCxnSpPr>
         <p:spPr>
           <a:xfrm>
-            <a:off x="7134225" y="2428875"/>
-            <a:ext cx="152400" cy="0"/>
+            <a:off x="7191375" y="2276475"/>
+            <a:ext cx="1044575" cy="0"/>
           </a:xfrm>
           <a:prstGeom prst="line">
             <a:avLst/>
           </a:prstGeom>
-          <a:ln w="17780">
+          <a:ln w="19050">
             <a:solidFill>
-              <a:srgbClr val="475569"/>
+              <a:srgbClr val="2563EB"/>
             </a:solidFill>
           </a:ln>
         </p:spPr>
@@ -28562,20 +28573,20 @@
       </p:cxnSp>
       <p:sp>
         <p:nvSpPr>
-          <p:cNvPr id="21" name="Isosceles Triangle 20"/>
+          <p:cNvPr id="22" name="Isosceles Triangle 21"/>
           <p:cNvSpPr/>
           <p:nvPr/>
         </p:nvSpPr>
         <p:spPr>
           <a:xfrm rot="5400000">
-            <a:off x="7200901" y="2386013"/>
+            <a:off x="8150226" y="2233613"/>
             <a:ext cx="85725" cy="85725"/>
           </a:xfrm>
           <a:prstGeom prst="triangle">
             <a:avLst/>
           </a:prstGeom>
           <a:solidFill>
-            <a:srgbClr val="475569"/>
+            <a:srgbClr val="2563EB"/>
           </a:solidFill>
           <a:ln>
             <a:noFill/>
@@ -28606,14 +28617,62 @@
       </p:sp>
       <p:sp>
         <p:nvSpPr>
-          <p:cNvPr id="22" name="TextBox 21"/>
+          <p:cNvPr id="23" name="Rounded Rectangle 22"/>
+          <p:cNvSpPr/>
+          <p:nvPr/>
+        </p:nvSpPr>
+        <p:spPr>
+          <a:xfrm>
+            <a:off x="6942137" y="2133600"/>
+            <a:ext cx="1543050" cy="285750"/>
+          </a:xfrm>
+          <a:prstGeom prst="roundRect">
+            <a:avLst>
+              <a:gd name="adj" fmla="val 8000"/>
+            </a:avLst>
+          </a:prstGeom>
+          <a:solidFill>
+            <a:srgbClr val="FFFFFF"/>
+          </a:solidFill>
+          <a:ln w="12700">
+            <a:solidFill>
+              <a:srgbClr val="DDE5EE"/>
+            </a:solidFill>
+          </a:ln>
+          <a:effectLst/>
+        </p:spPr>
+        <p:style>
+          <a:lnRef idx="1">
+            <a:schemeClr val="accent1"/>
+          </a:lnRef>
+          <a:fillRef idx="3">
+            <a:schemeClr val="accent1"/>
+          </a:fillRef>
+          <a:effectRef idx="2">
+            <a:schemeClr val="accent1"/>
+          </a:effectRef>
+          <a:fontRef idx="minor">
+            <a:schemeClr val="lt1"/>
+          </a:fontRef>
+        </p:style>
+        <p:txBody>
+          <a:bodyPr rtlCol="0" anchor="ctr"/>
+          <a:lstStyle/>
+          <a:p>
+            <a:pPr algn="ctr"/>
+          </a:p>
+        </p:txBody>
+      </p:sp>
+      <p:sp>
+        <p:nvSpPr>
+          <p:cNvPr id="24" name="TextBox 23"/>
           <p:cNvSpPr txBox="1"/>
           <p:nvPr/>
         </p:nvSpPr>
         <p:spPr>
           <a:xfrm>
-            <a:off x="6353175" y="2105025"/>
-            <a:ext cx="1714500" cy="228600"/>
+            <a:off x="6942137" y="2133600"/>
+            <a:ext cx="1543050" cy="285750"/>
           </a:xfrm>
           <a:prstGeom prst="rect">
             <a:avLst/>
@@ -28632,36 +28691,75 @@
               </a:lnSpc>
             </a:pPr>
             <a:r>
-              <a:rPr sz="900" b="0">
-                <a:solidFill>
-                  <a:srgbClr val="94A3B8"/>
+              <a:rPr sz="1100" b="1">
+                <a:solidFill>
+                  <a:srgbClr val="0B1D3A"/>
                 </a:solidFill>
                 <a:latin typeface="PingFang SC"/>
               </a:rPr>
-              <a:t>wait_for 执行</a:t>
+              <a:t>wait_f</a:t>
             </a:r>
           </a:p>
         </p:txBody>
       </p:sp>
       <p:cxnSp>
         <p:nvCxnSpPr>
-          <p:cNvPr id="23" name="Connector 22"/>
+          <p:cNvPr id="25" name="Connector 24"/>
           <p:cNvCxnSpPr/>
           <p:nvPr/>
         </p:nvCxnSpPr>
         <p:spPr>
+          <a:xfrm flipV="1">
+            <a:off x="9398000" y="1562100"/>
+            <a:ext cx="0" cy="419100"/>
+          </a:xfrm>
+          <a:prstGeom prst="line">
+            <a:avLst/>
+          </a:prstGeom>
+          <a:ln w="12700">
+            <a:solidFill>
+              <a:srgbClr val="DDE5EE"/>
+            </a:solidFill>
+            <a:prstDash val="dash"/>
+          </a:ln>
+          <a:effectLst/>
+        </p:spPr>
+        <p:style>
+          <a:lnRef idx="2">
+            <a:schemeClr val="accent1"/>
+          </a:lnRef>
+          <a:fillRef idx="0">
+            <a:schemeClr val="accent1"/>
+          </a:fillRef>
+          <a:effectRef idx="1">
+            <a:schemeClr val="accent1"/>
+          </a:effectRef>
+          <a:fontRef idx="minor">
+            <a:schemeClr val="tx1"/>
+          </a:fontRef>
+        </p:style>
+      </p:cxnSp>
+      <p:cxnSp>
+        <p:nvCxnSpPr>
+          <p:cNvPr id="26" name="Connector 25"/>
+          <p:cNvCxnSpPr/>
+          <p:nvPr/>
+        </p:nvCxnSpPr>
+        <p:spPr>
           <a:xfrm flipH="1">
-            <a:off x="4752975" y="2428875"/>
-            <a:ext cx="3648075" cy="1619250"/>
+            <a:off x="2794000" y="1562100"/>
+            <a:ext cx="6604000" cy="0"/>
           </a:xfrm>
           <a:prstGeom prst="line">
             <a:avLst/>
           </a:prstGeom>
-          <a:ln w="17780">
+          <a:ln w="12700">
             <a:solidFill>
-              <a:srgbClr val="475569"/>
+              <a:srgbClr val="DDE5EE"/>
             </a:solidFill>
-          </a:ln>
+            <a:prstDash val="dash"/>
+          </a:ln>
+          <a:effectLst/>
         </p:spPr>
         <p:style>
           <a:lnRef idx="2">
@@ -28678,22 +28776,94 @@
           </a:fontRef>
         </p:style>
       </p:cxnSp>
-      <p:sp>
-        <p:nvSpPr>
-          <p:cNvPr id="24" name="Isosceles Triangle 23"/>
-          <p:cNvSpPr/>
-          <p:nvPr/>
-        </p:nvSpPr>
-        <p:spPr>
-          <a:xfrm rot="14763917">
-            <a:off x="4749289" y="3987874"/>
+      <p:cxnSp>
+        <p:nvCxnSpPr>
+          <p:cNvPr id="27" name="Connector 26"/>
+          <p:cNvCxnSpPr/>
+          <p:nvPr/>
+        </p:nvCxnSpPr>
+        <p:spPr>
+          <a:xfrm>
+            <a:off x="2794000" y="1562100"/>
+            <a:ext cx="0" cy="1781175"/>
+          </a:xfrm>
+          <a:prstGeom prst="line">
+            <a:avLst/>
+          </a:prstGeom>
+          <a:ln w="12700">
+            <a:solidFill>
+              <a:srgbClr val="DDE5EE"/>
+            </a:solidFill>
+            <a:prstDash val="dash"/>
+          </a:ln>
+          <a:effectLst/>
+        </p:spPr>
+        <p:style>
+          <a:lnRef idx="2">
+            <a:schemeClr val="accent1"/>
+          </a:lnRef>
+          <a:fillRef idx="0">
+            <a:schemeClr val="accent1"/>
+          </a:fillRef>
+          <a:effectRef idx="1">
+            <a:schemeClr val="accent1"/>
+          </a:effectRef>
+          <a:fontRef idx="minor">
+            <a:schemeClr val="tx1"/>
+          </a:fontRef>
+        </p:style>
+      </p:cxnSp>
+      <p:cxnSp>
+        <p:nvCxnSpPr>
+          <p:cNvPr id="28" name="Connector 27"/>
+          <p:cNvCxnSpPr/>
+          <p:nvPr/>
+        </p:nvCxnSpPr>
+        <p:spPr>
+          <a:xfrm>
+            <a:off x="9398000" y="2552700"/>
+            <a:ext cx="0" cy="809625"/>
+          </a:xfrm>
+          <a:prstGeom prst="line">
+            <a:avLst/>
+          </a:prstGeom>
+          <a:ln w="19050">
+            <a:solidFill>
+              <a:srgbClr val="2563EB"/>
+            </a:solidFill>
+          </a:ln>
+        </p:spPr>
+        <p:style>
+          <a:lnRef idx="2">
+            <a:schemeClr val="accent1"/>
+          </a:lnRef>
+          <a:fillRef idx="0">
+            <a:schemeClr val="accent1"/>
+          </a:fillRef>
+          <a:effectRef idx="1">
+            <a:schemeClr val="accent1"/>
+          </a:effectRef>
+          <a:fontRef idx="minor">
+            <a:schemeClr val="tx1"/>
+          </a:fontRef>
+        </p:style>
+      </p:cxnSp>
+      <p:sp>
+        <p:nvSpPr>
+          <p:cNvPr id="29" name="Isosceles Triangle 28"/>
+          <p:cNvSpPr/>
+          <p:nvPr/>
+        </p:nvSpPr>
+        <p:spPr>
+          <a:xfrm rot="10800000">
+            <a:off x="9355138" y="3276601"/>
             <a:ext cx="85725" cy="85725"/>
           </a:xfrm>
           <a:prstGeom prst="triangle">
             <a:avLst/>
           </a:prstGeom>
           <a:solidFill>
-            <a:srgbClr val="475569"/>
+            <a:srgbClr val="2563EB"/>
           </a:solidFill>
           <a:ln>
             <a:noFill/>
@@ -28724,14 +28894,62 @@
       </p:sp>
       <p:sp>
         <p:nvSpPr>
-          <p:cNvPr id="25" name="TextBox 24"/>
+          <p:cNvPr id="30" name="Rounded Rectangle 29"/>
+          <p:cNvSpPr/>
+          <p:nvPr/>
+        </p:nvSpPr>
+        <p:spPr>
+          <a:xfrm>
+            <a:off x="8836025" y="2814637"/>
+            <a:ext cx="1123950" cy="285750"/>
+          </a:xfrm>
+          <a:prstGeom prst="roundRect">
+            <a:avLst>
+              <a:gd name="adj" fmla="val 8000"/>
+            </a:avLst>
+          </a:prstGeom>
+          <a:solidFill>
+            <a:srgbClr val="FFFFFF"/>
+          </a:solidFill>
+          <a:ln w="12700">
+            <a:solidFill>
+              <a:srgbClr val="DDE5EE"/>
+            </a:solidFill>
+          </a:ln>
+          <a:effectLst/>
+        </p:spPr>
+        <p:style>
+          <a:lnRef idx="1">
+            <a:schemeClr val="accent1"/>
+          </a:lnRef>
+          <a:fillRef idx="3">
+            <a:schemeClr val="accent1"/>
+          </a:fillRef>
+          <a:effectRef idx="2">
+            <a:schemeClr val="accent1"/>
+          </a:effectRef>
+          <a:fontRef idx="minor">
+            <a:schemeClr val="lt1"/>
+          </a:fontRef>
+        </p:style>
+        <p:txBody>
+          <a:bodyPr rtlCol="0" anchor="ctr"/>
+          <a:lstStyle/>
+          <a:p>
+            <a:pPr algn="ctr"/>
+          </a:p>
+        </p:txBody>
+      </p:sp>
+      <p:sp>
+        <p:nvSpPr>
+          <p:cNvPr id="31" name="TextBox 30"/>
           <p:cNvSpPr txBox="1"/>
           <p:nvPr/>
         </p:nvSpPr>
         <p:spPr>
           <a:xfrm>
-            <a:off x="5643562" y="2105025"/>
-            <a:ext cx="1714500" cy="228600"/>
+            <a:off x="8836025" y="2814637"/>
+            <a:ext cx="1123950" cy="285750"/>
           </a:xfrm>
           <a:prstGeom prst="rect">
             <a:avLst/>
@@ -28750,127 +28968,9 @@
               </a:lnSpc>
             </a:pPr>
             <a:r>
-              <a:rPr sz="900" b="0">
-                <a:solidFill>
-                  <a:srgbClr val="94A3B8"/>
-                </a:solidFill>
-                <a:latin typeface="PingFang SC"/>
-              </a:rPr>
-              <a:t>结果落审计</a:t>
-            </a:r>
-          </a:p>
-        </p:txBody>
-      </p:sp>
-      <p:cxnSp>
-        <p:nvCxnSpPr>
-          <p:cNvPr id="26" name="Connector 25"/>
-          <p:cNvCxnSpPr/>
-          <p:nvPr/>
-        </p:nvCxnSpPr>
-        <p:spPr>
-          <a:xfrm>
-            <a:off x="8401050" y="2952750"/>
-            <a:ext cx="0" cy="571500"/>
-          </a:xfrm>
-          <a:prstGeom prst="line">
-            <a:avLst/>
-          </a:prstGeom>
-          <a:ln w="17780">
-            <a:solidFill>
-              <a:srgbClr val="475569"/>
-            </a:solidFill>
-          </a:ln>
-        </p:spPr>
-        <p:style>
-          <a:lnRef idx="2">
-            <a:schemeClr val="accent1"/>
-          </a:lnRef>
-          <a:fillRef idx="0">
-            <a:schemeClr val="accent1"/>
-          </a:fillRef>
-          <a:effectRef idx="1">
-            <a:schemeClr val="accent1"/>
-          </a:effectRef>
-          <a:fontRef idx="minor">
-            <a:schemeClr val="tx1"/>
-          </a:fontRef>
-        </p:style>
-      </p:cxnSp>
-      <p:sp>
-        <p:nvSpPr>
-          <p:cNvPr id="27" name="Isosceles Triangle 26"/>
-          <p:cNvSpPr/>
-          <p:nvPr/>
-        </p:nvSpPr>
-        <p:spPr>
-          <a:xfrm rot="10800000">
-            <a:off x="8358188" y="3438526"/>
-            <a:ext cx="85725" cy="85725"/>
-          </a:xfrm>
-          <a:prstGeom prst="triangle">
-            <a:avLst/>
-          </a:prstGeom>
-          <a:solidFill>
-            <a:srgbClr val="475569"/>
-          </a:solidFill>
-          <a:ln>
-            <a:noFill/>
-          </a:ln>
-          <a:effectLst/>
-        </p:spPr>
-        <p:style>
-          <a:lnRef idx="1">
-            <a:schemeClr val="accent1"/>
-          </a:lnRef>
-          <a:fillRef idx="3">
-            <a:schemeClr val="accent1"/>
-          </a:fillRef>
-          <a:effectRef idx="2">
-            <a:schemeClr val="accent1"/>
-          </a:effectRef>
-          <a:fontRef idx="minor">
-            <a:schemeClr val="lt1"/>
-          </a:fontRef>
-        </p:style>
-        <p:txBody>
-          <a:bodyPr rtlCol="0" anchor="ctr"/>
-          <a:lstStyle/>
-          <a:p>
-            <a:pPr algn="ctr"/>
-          </a:p>
-        </p:txBody>
-      </p:sp>
-      <p:sp>
-        <p:nvSpPr>
-          <p:cNvPr id="28" name="TextBox 27"/>
-          <p:cNvSpPr txBox="1"/>
-          <p:nvPr/>
-        </p:nvSpPr>
-        <p:spPr>
-          <a:xfrm>
-            <a:off x="8024812" y="2105025"/>
-            <a:ext cx="1714500" cy="228600"/>
-          </a:xfrm>
-          <a:prstGeom prst="rect">
-            <a:avLst/>
-          </a:prstGeom>
-          <a:noFill/>
-        </p:spPr>
-        <p:txBody>
-          <a:bodyPr wrap="square" anchor="ctr">
-            <a:spAutoFit/>
-          </a:bodyPr>
-          <a:lstStyle/>
-          <a:p>
-            <a:pPr algn="ctr">
-              <a:lnSpc>
-                <a:spcPct val="100000"/>
-              </a:lnSpc>
-            </a:pPr>
-            <a:r>
-              <a:rPr sz="900" b="0">
-                <a:solidFill>
-                  <a:srgbClr val="94A3B8"/>
+              <a:rPr sz="1100" b="1">
+                <a:solidFill>
+                  <a:srgbClr val="0B1D3A"/>
                 </a:solidFill>
                 <a:latin typeface="PingFang SC"/>
               </a:rPr>
@@ -28881,23 +28981,25 @@
       </p:sp>
       <p:cxnSp>
         <p:nvCxnSpPr>
-          <p:cNvPr id="29" name="Connector 28"/>
+          <p:cNvPr id="32" name="Connector 31"/>
           <p:cNvCxnSpPr/>
           <p:nvPr/>
         </p:nvCxnSpPr>
         <p:spPr>
-          <a:xfrm>
-            <a:off x="4752975" y="2428875"/>
-            <a:ext cx="152400" cy="1619250"/>
+          <a:xfrm flipV="1">
+            <a:off x="2794000" y="1562100"/>
+            <a:ext cx="0" cy="419100"/>
           </a:xfrm>
           <a:prstGeom prst="line">
             <a:avLst/>
           </a:prstGeom>
-          <a:ln w="17780">
+          <a:ln w="12700">
             <a:solidFill>
-              <a:srgbClr val="475569"/>
+              <a:srgbClr val="DDE5EE"/>
             </a:solidFill>
-          </a:ln>
+            <a:prstDash val="dash"/>
+          </a:ln>
+          <a:effectLst/>
         </p:spPr>
         <p:style>
           <a:lnRef idx="2">
@@ -28914,92 +29016,83 @@
           </a:fontRef>
         </p:style>
       </p:cxnSp>
-      <p:sp>
-        <p:nvSpPr>
-          <p:cNvPr id="30" name="Isosceles Triangle 29"/>
-          <p:cNvSpPr/>
-          <p:nvPr/>
-        </p:nvSpPr>
-        <p:spPr>
-          <a:xfrm rot="10477398">
-            <a:off x="4858497" y="3962590"/>
-            <a:ext cx="85725" cy="85725"/>
-          </a:xfrm>
-          <a:prstGeom prst="triangle">
-            <a:avLst/>
-          </a:prstGeom>
-          <a:solidFill>
-            <a:srgbClr val="475569"/>
-          </a:solidFill>
-          <a:ln>
-            <a:noFill/>
-          </a:ln>
-          <a:effectLst/>
-        </p:spPr>
-        <p:style>
-          <a:lnRef idx="1">
-            <a:schemeClr val="accent1"/>
-          </a:lnRef>
-          <a:fillRef idx="3">
-            <a:schemeClr val="accent1"/>
-          </a:fillRef>
-          <a:effectRef idx="2">
-            <a:schemeClr val="accent1"/>
-          </a:effectRef>
-          <a:fontRef idx="minor">
-            <a:schemeClr val="lt1"/>
-          </a:fontRef>
-        </p:style>
-        <p:txBody>
-          <a:bodyPr rtlCol="0" anchor="ctr"/>
-          <a:lstStyle/>
-          <a:p>
-            <a:pPr algn="ctr"/>
-          </a:p>
-        </p:txBody>
-      </p:sp>
-      <p:sp>
-        <p:nvSpPr>
-          <p:cNvPr id="31" name="TextBox 30"/>
-          <p:cNvSpPr txBox="1"/>
-          <p:nvPr/>
-        </p:nvSpPr>
-        <p:spPr>
-          <a:xfrm>
-            <a:off x="3971925" y="2105025"/>
-            <a:ext cx="1714500" cy="228600"/>
-          </a:xfrm>
-          <a:prstGeom prst="rect">
-            <a:avLst/>
-          </a:prstGeom>
-          <a:noFill/>
-        </p:spPr>
-        <p:txBody>
-          <a:bodyPr wrap="square" anchor="ctr">
-            <a:spAutoFit/>
-          </a:bodyPr>
-          <a:lstStyle/>
-          <a:p>
-            <a:pPr algn="ctr">
-              <a:lnSpc>
-                <a:spcPct val="100000"/>
-              </a:lnSpc>
-            </a:pPr>
-            <a:r>
-              <a:rPr sz="900" b="0">
-                <a:solidFill>
-                  <a:srgbClr val="94A3B8"/>
-                </a:solidFill>
-                <a:latin typeface="PingFang SC"/>
-              </a:rPr>
-              <a:t>readonly/未确认</a:t>
-            </a:r>
-          </a:p>
-        </p:txBody>
-      </p:sp>
-      <p:sp>
-        <p:nvSpPr>
-          <p:cNvPr id="32" name="TextBox 31"/>
+      <p:cxnSp>
+        <p:nvCxnSpPr>
+          <p:cNvPr id="33" name="Connector 32"/>
+          <p:cNvCxnSpPr/>
+          <p:nvPr/>
+        </p:nvCxnSpPr>
+        <p:spPr>
+          <a:xfrm>
+            <a:off x="2794000" y="1562100"/>
+            <a:ext cx="3302000" cy="0"/>
+          </a:xfrm>
+          <a:prstGeom prst="line">
+            <a:avLst/>
+          </a:prstGeom>
+          <a:ln w="12700">
+            <a:solidFill>
+              <a:srgbClr val="DDE5EE"/>
+            </a:solidFill>
+            <a:prstDash val="dash"/>
+          </a:ln>
+          <a:effectLst/>
+        </p:spPr>
+        <p:style>
+          <a:lnRef idx="2">
+            <a:schemeClr val="accent1"/>
+          </a:lnRef>
+          <a:fillRef idx="0">
+            <a:schemeClr val="accent1"/>
+          </a:fillRef>
+          <a:effectRef idx="1">
+            <a:schemeClr val="accent1"/>
+          </a:effectRef>
+          <a:fontRef idx="minor">
+            <a:schemeClr val="tx1"/>
+          </a:fontRef>
+        </p:style>
+      </p:cxnSp>
+      <p:cxnSp>
+        <p:nvCxnSpPr>
+          <p:cNvPr id="34" name="Connector 33"/>
+          <p:cNvCxnSpPr/>
+          <p:nvPr/>
+        </p:nvCxnSpPr>
+        <p:spPr>
+          <a:xfrm>
+            <a:off x="6096000" y="1562100"/>
+            <a:ext cx="0" cy="1781175"/>
+          </a:xfrm>
+          <a:prstGeom prst="line">
+            <a:avLst/>
+          </a:prstGeom>
+          <a:ln w="12700">
+            <a:solidFill>
+              <a:srgbClr val="DDE5EE"/>
+            </a:solidFill>
+            <a:prstDash val="dash"/>
+          </a:ln>
+          <a:effectLst/>
+        </p:spPr>
+        <p:style>
+          <a:lnRef idx="2">
+            <a:schemeClr val="accent1"/>
+          </a:lnRef>
+          <a:fillRef idx="0">
+            <a:schemeClr val="accent1"/>
+          </a:fillRef>
+          <a:effectRef idx="1">
+            <a:schemeClr val="accent1"/>
+          </a:effectRef>
+          <a:fontRef idx="minor">
+            <a:schemeClr val="tx1"/>
+          </a:fontRef>
+        </p:style>
+      </p:cxnSp>
+      <p:sp>
+        <p:nvSpPr>
+          <p:cNvPr id="35" name="TextBox 34"/>
           <p:cNvSpPr txBox="1"/>
           <p:nvPr/>
         </p:nvSpPr>
@@ -29038,7 +29131,7 @@
       </p:sp>
       <p:sp>
         <p:nvSpPr>
-          <p:cNvPr id="33" name="TextBox 32"/>
+          <p:cNvPr id="36" name="TextBox 35"/>
           <p:cNvSpPr txBox="1"/>
           <p:nvPr/>
         </p:nvSpPr>

--- a/03-课件PPT/讲次版/第2章-3-讲次 2-3 · 工具治理与安全边界.pptx
+++ b/03-课件PPT/讲次版/第2章-3-讲次 2-3 · 工具治理与安全边界.pptx
@@ -28457,8 +28457,8 @@
         </p:nvSpPr>
         <p:spPr>
           <a:xfrm>
-            <a:off x="3849687" y="2133600"/>
-            <a:ext cx="1123950" cy="285750"/>
+            <a:off x="3849687" y="2124075"/>
+            <a:ext cx="1123950" cy="304800"/>
           </a:xfrm>
           <a:prstGeom prst="roundRect">
             <a:avLst>
@@ -28505,8 +28505,8 @@
         </p:nvSpPr>
         <p:spPr>
           <a:xfrm>
-            <a:off x="3849687" y="2133600"/>
-            <a:ext cx="1123950" cy="285750"/>
+            <a:off x="3849687" y="2124075"/>
+            <a:ext cx="1123950" cy="304800"/>
           </a:xfrm>
           <a:prstGeom prst="rect">
             <a:avLst/>
@@ -28623,8 +28623,8 @@
         </p:nvSpPr>
         <p:spPr>
           <a:xfrm>
-            <a:off x="6942137" y="2133600"/>
-            <a:ext cx="1543050" cy="285750"/>
+            <a:off x="6861175" y="2124075"/>
+            <a:ext cx="1704975" cy="304800"/>
           </a:xfrm>
           <a:prstGeom prst="roundRect">
             <a:avLst>
@@ -28671,8 +28671,8 @@
         </p:nvSpPr>
         <p:spPr>
           <a:xfrm>
-            <a:off x="6942137" y="2133600"/>
-            <a:ext cx="1543050" cy="285750"/>
+            <a:off x="6861175" y="2124075"/>
+            <a:ext cx="1704975" cy="304800"/>
           </a:xfrm>
           <a:prstGeom prst="rect">
             <a:avLst/>
@@ -28697,7 +28697,7 @@
                 </a:solidFill>
                 <a:latin typeface="PingFang SC"/>
               </a:rPr>
-              <a:t>wait_f</a:t>
+              <a:t>wait_for 执行</a:t>
             </a:r>
           </a:p>
         </p:txBody>
@@ -28709,247 +28709,136 @@
           <p:nvPr/>
         </p:nvCxnSpPr>
         <p:spPr>
-          <a:xfrm flipV="1">
-            <a:off x="9398000" y="1562100"/>
-            <a:ext cx="0" cy="419100"/>
+          <a:xfrm>
+            <a:off x="9398000" y="2552700"/>
+            <a:ext cx="0" cy="809625"/>
           </a:xfrm>
           <a:prstGeom prst="line">
             <a:avLst/>
           </a:prstGeom>
+          <a:ln w="19050">
+            <a:solidFill>
+              <a:srgbClr val="2563EB"/>
+            </a:solidFill>
+          </a:ln>
+        </p:spPr>
+        <p:style>
+          <a:lnRef idx="2">
+            <a:schemeClr val="accent1"/>
+          </a:lnRef>
+          <a:fillRef idx="0">
+            <a:schemeClr val="accent1"/>
+          </a:fillRef>
+          <a:effectRef idx="1">
+            <a:schemeClr val="accent1"/>
+          </a:effectRef>
+          <a:fontRef idx="minor">
+            <a:schemeClr val="tx1"/>
+          </a:fontRef>
+        </p:style>
+      </p:cxnSp>
+      <p:sp>
+        <p:nvSpPr>
+          <p:cNvPr id="26" name="Isosceles Triangle 25"/>
+          <p:cNvSpPr/>
+          <p:nvPr/>
+        </p:nvSpPr>
+        <p:spPr>
+          <a:xfrm rot="10800000">
+            <a:off x="9355138" y="3276601"/>
+            <a:ext cx="85725" cy="85725"/>
+          </a:xfrm>
+          <a:prstGeom prst="triangle">
+            <a:avLst/>
+          </a:prstGeom>
+          <a:solidFill>
+            <a:srgbClr val="2563EB"/>
+          </a:solidFill>
+          <a:ln>
+            <a:noFill/>
+          </a:ln>
+          <a:effectLst/>
+        </p:spPr>
+        <p:style>
+          <a:lnRef idx="1">
+            <a:schemeClr val="accent1"/>
+          </a:lnRef>
+          <a:fillRef idx="3">
+            <a:schemeClr val="accent1"/>
+          </a:fillRef>
+          <a:effectRef idx="2">
+            <a:schemeClr val="accent1"/>
+          </a:effectRef>
+          <a:fontRef idx="minor">
+            <a:schemeClr val="lt1"/>
+          </a:fontRef>
+        </p:style>
+        <p:txBody>
+          <a:bodyPr rtlCol="0" anchor="ctr"/>
+          <a:lstStyle/>
+          <a:p>
+            <a:pPr algn="ctr"/>
+          </a:p>
+        </p:txBody>
+      </p:sp>
+      <p:sp>
+        <p:nvSpPr>
+          <p:cNvPr id="27" name="Rounded Rectangle 26"/>
+          <p:cNvSpPr/>
+          <p:nvPr/>
+        </p:nvSpPr>
+        <p:spPr>
+          <a:xfrm>
+            <a:off x="8836025" y="2805112"/>
+            <a:ext cx="1123950" cy="304800"/>
+          </a:xfrm>
+          <a:prstGeom prst="roundRect">
+            <a:avLst>
+              <a:gd name="adj" fmla="val 8000"/>
+            </a:avLst>
+          </a:prstGeom>
+          <a:solidFill>
+            <a:srgbClr val="FFFFFF"/>
+          </a:solidFill>
           <a:ln w="12700">
             <a:solidFill>
               <a:srgbClr val="DDE5EE"/>
             </a:solidFill>
-            <a:prstDash val="dash"/>
-          </a:ln>
-          <a:effectLst/>
-        </p:spPr>
-        <p:style>
-          <a:lnRef idx="2">
-            <a:schemeClr val="accent1"/>
-          </a:lnRef>
-          <a:fillRef idx="0">
-            <a:schemeClr val="accent1"/>
-          </a:fillRef>
-          <a:effectRef idx="1">
-            <a:schemeClr val="accent1"/>
-          </a:effectRef>
-          <a:fontRef idx="minor">
-            <a:schemeClr val="tx1"/>
-          </a:fontRef>
-        </p:style>
-      </p:cxnSp>
-      <p:cxnSp>
-        <p:nvCxnSpPr>
-          <p:cNvPr id="26" name="Connector 25"/>
-          <p:cNvCxnSpPr/>
-          <p:nvPr/>
-        </p:nvCxnSpPr>
-        <p:spPr>
-          <a:xfrm flipH="1">
-            <a:off x="2794000" y="1562100"/>
-            <a:ext cx="6604000" cy="0"/>
-          </a:xfrm>
-          <a:prstGeom prst="line">
-            <a:avLst/>
-          </a:prstGeom>
-          <a:ln w="12700">
-            <a:solidFill>
-              <a:srgbClr val="DDE5EE"/>
-            </a:solidFill>
-            <a:prstDash val="dash"/>
-          </a:ln>
-          <a:effectLst/>
-        </p:spPr>
-        <p:style>
-          <a:lnRef idx="2">
-            <a:schemeClr val="accent1"/>
-          </a:lnRef>
-          <a:fillRef idx="0">
-            <a:schemeClr val="accent1"/>
-          </a:fillRef>
-          <a:effectRef idx="1">
-            <a:schemeClr val="accent1"/>
-          </a:effectRef>
-          <a:fontRef idx="minor">
-            <a:schemeClr val="tx1"/>
-          </a:fontRef>
-        </p:style>
-      </p:cxnSp>
-      <p:cxnSp>
-        <p:nvCxnSpPr>
-          <p:cNvPr id="27" name="Connector 26"/>
-          <p:cNvCxnSpPr/>
-          <p:nvPr/>
-        </p:nvCxnSpPr>
-        <p:spPr>
-          <a:xfrm>
-            <a:off x="2794000" y="1562100"/>
-            <a:ext cx="0" cy="1781175"/>
-          </a:xfrm>
-          <a:prstGeom prst="line">
-            <a:avLst/>
-          </a:prstGeom>
-          <a:ln w="12700">
-            <a:solidFill>
-              <a:srgbClr val="DDE5EE"/>
-            </a:solidFill>
-            <a:prstDash val="dash"/>
-          </a:ln>
-          <a:effectLst/>
-        </p:spPr>
-        <p:style>
-          <a:lnRef idx="2">
-            <a:schemeClr val="accent1"/>
-          </a:lnRef>
-          <a:fillRef idx="0">
-            <a:schemeClr val="accent1"/>
-          </a:fillRef>
-          <a:effectRef idx="1">
-            <a:schemeClr val="accent1"/>
-          </a:effectRef>
-          <a:fontRef idx="minor">
-            <a:schemeClr val="tx1"/>
-          </a:fontRef>
-        </p:style>
-      </p:cxnSp>
-      <p:cxnSp>
-        <p:nvCxnSpPr>
-          <p:cNvPr id="28" name="Connector 27"/>
-          <p:cNvCxnSpPr/>
-          <p:nvPr/>
-        </p:nvCxnSpPr>
-        <p:spPr>
-          <a:xfrm>
-            <a:off x="9398000" y="2552700"/>
-            <a:ext cx="0" cy="809625"/>
-          </a:xfrm>
-          <a:prstGeom prst="line">
-            <a:avLst/>
-          </a:prstGeom>
-          <a:ln w="19050">
-            <a:solidFill>
-              <a:srgbClr val="2563EB"/>
-            </a:solidFill>
-          </a:ln>
-        </p:spPr>
-        <p:style>
-          <a:lnRef idx="2">
-            <a:schemeClr val="accent1"/>
-          </a:lnRef>
-          <a:fillRef idx="0">
-            <a:schemeClr val="accent1"/>
-          </a:fillRef>
-          <a:effectRef idx="1">
-            <a:schemeClr val="accent1"/>
-          </a:effectRef>
-          <a:fontRef idx="minor">
-            <a:schemeClr val="tx1"/>
-          </a:fontRef>
-        </p:style>
-      </p:cxnSp>
-      <p:sp>
-        <p:nvSpPr>
-          <p:cNvPr id="29" name="Isosceles Triangle 28"/>
-          <p:cNvSpPr/>
-          <p:nvPr/>
-        </p:nvSpPr>
-        <p:spPr>
-          <a:xfrm rot="10800000">
-            <a:off x="9355138" y="3276601"/>
-            <a:ext cx="85725" cy="85725"/>
-          </a:xfrm>
-          <a:prstGeom prst="triangle">
-            <a:avLst/>
-          </a:prstGeom>
-          <a:solidFill>
-            <a:srgbClr val="2563EB"/>
-          </a:solidFill>
-          <a:ln>
-            <a:noFill/>
-          </a:ln>
-          <a:effectLst/>
-        </p:spPr>
-        <p:style>
-          <a:lnRef idx="1">
-            <a:schemeClr val="accent1"/>
-          </a:lnRef>
-          <a:fillRef idx="3">
-            <a:schemeClr val="accent1"/>
-          </a:fillRef>
-          <a:effectRef idx="2">
-            <a:schemeClr val="accent1"/>
-          </a:effectRef>
-          <a:fontRef idx="minor">
-            <a:schemeClr val="lt1"/>
-          </a:fontRef>
-        </p:style>
-        <p:txBody>
-          <a:bodyPr rtlCol="0" anchor="ctr"/>
-          <a:lstStyle/>
-          <a:p>
-            <a:pPr algn="ctr"/>
-          </a:p>
-        </p:txBody>
-      </p:sp>
-      <p:sp>
-        <p:nvSpPr>
-          <p:cNvPr id="30" name="Rounded Rectangle 29"/>
-          <p:cNvSpPr/>
-          <p:nvPr/>
-        </p:nvSpPr>
-        <p:spPr>
-          <a:xfrm>
-            <a:off x="8836025" y="2814637"/>
-            <a:ext cx="1123950" cy="285750"/>
-          </a:xfrm>
-          <a:prstGeom prst="roundRect">
-            <a:avLst>
-              <a:gd name="adj" fmla="val 8000"/>
-            </a:avLst>
-          </a:prstGeom>
-          <a:solidFill>
-            <a:srgbClr val="FFFFFF"/>
-          </a:solidFill>
-          <a:ln w="12700">
-            <a:solidFill>
-              <a:srgbClr val="DDE5EE"/>
-            </a:solidFill>
-          </a:ln>
-          <a:effectLst/>
-        </p:spPr>
-        <p:style>
-          <a:lnRef idx="1">
-            <a:schemeClr val="accent1"/>
-          </a:lnRef>
-          <a:fillRef idx="3">
-            <a:schemeClr val="accent1"/>
-          </a:fillRef>
-          <a:effectRef idx="2">
-            <a:schemeClr val="accent1"/>
-          </a:effectRef>
-          <a:fontRef idx="minor">
-            <a:schemeClr val="lt1"/>
-          </a:fontRef>
-        </p:style>
-        <p:txBody>
-          <a:bodyPr rtlCol="0" anchor="ctr"/>
-          <a:lstStyle/>
-          <a:p>
-            <a:pPr algn="ctr"/>
-          </a:p>
-        </p:txBody>
-      </p:sp>
-      <p:sp>
-        <p:nvSpPr>
-          <p:cNvPr id="31" name="TextBox 30"/>
+          </a:ln>
+          <a:effectLst/>
+        </p:spPr>
+        <p:style>
+          <a:lnRef idx="1">
+            <a:schemeClr val="accent1"/>
+          </a:lnRef>
+          <a:fillRef idx="3">
+            <a:schemeClr val="accent1"/>
+          </a:fillRef>
+          <a:effectRef idx="2">
+            <a:schemeClr val="accent1"/>
+          </a:effectRef>
+          <a:fontRef idx="minor">
+            <a:schemeClr val="lt1"/>
+          </a:fontRef>
+        </p:style>
+        <p:txBody>
+          <a:bodyPr rtlCol="0" anchor="ctr"/>
+          <a:lstStyle/>
+          <a:p>
+            <a:pPr algn="ctr"/>
+          </a:p>
+        </p:txBody>
+      </p:sp>
+      <p:sp>
+        <p:nvSpPr>
+          <p:cNvPr id="28" name="TextBox 27"/>
           <p:cNvSpPr txBox="1"/>
           <p:nvPr/>
         </p:nvSpPr>
         <p:spPr>
           <a:xfrm>
-            <a:off x="8836025" y="2814637"/>
-            <a:ext cx="1123950" cy="285750"/>
+            <a:off x="8836025" y="2805112"/>
+            <a:ext cx="1123950" cy="304800"/>
           </a:xfrm>
           <a:prstGeom prst="rect">
             <a:avLst/>
@@ -28979,120 +28868,94 @@
           </a:p>
         </p:txBody>
       </p:sp>
-      <p:cxnSp>
-        <p:nvCxnSpPr>
-          <p:cNvPr id="32" name="Connector 31"/>
-          <p:cNvCxnSpPr/>
-          <p:nvPr/>
-        </p:nvCxnSpPr>
-        <p:spPr>
-          <a:xfrm flipV="1">
-            <a:off x="2794000" y="1562100"/>
-            <a:ext cx="0" cy="419100"/>
-          </a:xfrm>
-          <a:prstGeom prst="line">
-            <a:avLst/>
-          </a:prstGeom>
-          <a:ln w="12700">
-            <a:solidFill>
-              <a:srgbClr val="DDE5EE"/>
-            </a:solidFill>
-            <a:prstDash val="dash"/>
-          </a:ln>
-          <a:effectLst/>
-        </p:spPr>
-        <p:style>
-          <a:lnRef idx="2">
-            <a:schemeClr val="accent1"/>
-          </a:lnRef>
-          <a:fillRef idx="0">
-            <a:schemeClr val="accent1"/>
-          </a:fillRef>
-          <a:effectRef idx="1">
-            <a:schemeClr val="accent1"/>
-          </a:effectRef>
-          <a:fontRef idx="minor">
-            <a:schemeClr val="tx1"/>
-          </a:fontRef>
-        </p:style>
-      </p:cxnSp>
-      <p:cxnSp>
-        <p:nvCxnSpPr>
-          <p:cNvPr id="33" name="Connector 32"/>
-          <p:cNvCxnSpPr/>
-          <p:nvPr/>
-        </p:nvCxnSpPr>
-        <p:spPr>
-          <a:xfrm>
-            <a:off x="2794000" y="1562100"/>
-            <a:ext cx="3302000" cy="0"/>
-          </a:xfrm>
-          <a:prstGeom prst="line">
-            <a:avLst/>
-          </a:prstGeom>
-          <a:ln w="12700">
-            <a:solidFill>
-              <a:srgbClr val="DDE5EE"/>
-            </a:solidFill>
-            <a:prstDash val="dash"/>
-          </a:ln>
-          <a:effectLst/>
-        </p:spPr>
-        <p:style>
-          <a:lnRef idx="2">
-            <a:schemeClr val="accent1"/>
-          </a:lnRef>
-          <a:fillRef idx="0">
-            <a:schemeClr val="accent1"/>
-          </a:fillRef>
-          <a:effectRef idx="1">
-            <a:schemeClr val="accent1"/>
-          </a:effectRef>
-          <a:fontRef idx="minor">
-            <a:schemeClr val="tx1"/>
-          </a:fontRef>
-        </p:style>
-      </p:cxnSp>
-      <p:cxnSp>
-        <p:nvCxnSpPr>
-          <p:cNvPr id="34" name="Connector 33"/>
-          <p:cNvCxnSpPr/>
-          <p:nvPr/>
-        </p:nvCxnSpPr>
-        <p:spPr>
-          <a:xfrm>
-            <a:off x="6096000" y="1562100"/>
-            <a:ext cx="0" cy="1781175"/>
-          </a:xfrm>
-          <a:prstGeom prst="line">
-            <a:avLst/>
-          </a:prstGeom>
-          <a:ln w="12700">
-            <a:solidFill>
-              <a:srgbClr val="DDE5EE"/>
-            </a:solidFill>
-            <a:prstDash val="dash"/>
-          </a:ln>
-          <a:effectLst/>
-        </p:spPr>
-        <p:style>
-          <a:lnRef idx="2">
-            <a:schemeClr val="accent1"/>
-          </a:lnRef>
-          <a:fillRef idx="0">
-            <a:schemeClr val="accent1"/>
-          </a:fillRef>
-          <a:effectRef idx="1">
-            <a:schemeClr val="accent1"/>
-          </a:effectRef>
-          <a:fontRef idx="minor">
-            <a:schemeClr val="tx1"/>
-          </a:fontRef>
-        </p:style>
-      </p:cxnSp>
-      <p:sp>
-        <p:nvSpPr>
-          <p:cNvPr id="35" name="TextBox 34"/>
+      <p:sp>
+        <p:nvSpPr>
+          <p:cNvPr id="29" name="Rounded Rectangle 28"/>
+          <p:cNvSpPr/>
+          <p:nvPr/>
+        </p:nvSpPr>
+        <p:spPr>
+          <a:xfrm>
+            <a:off x="1143000" y="6229350"/>
+            <a:ext cx="9906000" cy="381000"/>
+          </a:xfrm>
+          <a:prstGeom prst="roundRect">
+            <a:avLst>
+              <a:gd name="adj" fmla="val 8000"/>
+            </a:avLst>
+          </a:prstGeom>
+          <a:solidFill>
+            <a:srgbClr val="F1F5F9"/>
+          </a:solidFill>
+          <a:ln>
+            <a:noFill/>
+          </a:ln>
+          <a:effectLst/>
+        </p:spPr>
+        <p:style>
+          <a:lnRef idx="1">
+            <a:schemeClr val="accent1"/>
+          </a:lnRef>
+          <a:fillRef idx="3">
+            <a:schemeClr val="accent1"/>
+          </a:fillRef>
+          <a:effectRef idx="2">
+            <a:schemeClr val="accent1"/>
+          </a:effectRef>
+          <a:fontRef idx="minor">
+            <a:schemeClr val="lt1"/>
+          </a:fontRef>
+        </p:style>
+        <p:txBody>
+          <a:bodyPr rtlCol="0" anchor="ctr"/>
+          <a:lstStyle/>
+          <a:p>
+            <a:pPr algn="ctr"/>
+          </a:p>
+        </p:txBody>
+      </p:sp>
+      <p:sp>
+        <p:nvSpPr>
+          <p:cNvPr id="30" name="TextBox 29"/>
+          <p:cNvSpPr txBox="1"/>
+          <p:nvPr/>
+        </p:nvSpPr>
+        <p:spPr>
+          <a:xfrm>
+            <a:off x="1295400" y="6229350"/>
+            <a:ext cx="9601200" cy="381000"/>
+          </a:xfrm>
+          <a:prstGeom prst="rect">
+            <a:avLst/>
+          </a:prstGeom>
+          <a:noFill/>
+        </p:spPr>
+        <p:txBody>
+          <a:bodyPr wrap="square" anchor="ctr">
+            <a:spAutoFit/>
+          </a:bodyPr>
+          <a:lstStyle/>
+          <a:p>
+            <a:pPr algn="l">
+              <a:lnSpc>
+                <a:spcPct val="100000"/>
+              </a:lnSpc>
+            </a:pPr>
+            <a:r>
+              <a:rPr sz="1100" b="0">
+                <a:solidFill>
+                  <a:srgbClr val="475569"/>
+                </a:solidFill>
+                <a:latin typeface="PingFang SC"/>
+              </a:rPr>
+              <a:t>非相邻转移:EXECUTING → AUDITED  PENDING → REJECTED</a:t>
+            </a:r>
+          </a:p>
+        </p:txBody>
+      </p:sp>
+      <p:sp>
+        <p:nvSpPr>
+          <p:cNvPr id="31" name="TextBox 30"/>
           <p:cNvSpPr txBox="1"/>
           <p:nvPr/>
         </p:nvSpPr>
@@ -29131,7 +28994,7 @@
       </p:sp>
       <p:sp>
         <p:nvSpPr>
-          <p:cNvPr id="36" name="TextBox 35"/>
+          <p:cNvPr id="32" name="TextBox 31"/>
           <p:cNvSpPr txBox="1"/>
           <p:nvPr/>
         </p:nvSpPr>
